--- a/Paper-OTFE/PPT-Paper-OTFE.pptx
+++ b/Paper-OTFE/PPT-Paper-OTFE.pptx
@@ -1,9 +1,12 @@
 
 <file path=ppt/presentation.xml><?xml version="1.0" encoding="utf-8"?>
-<p:presentation xmlns:a="http://schemas.openxmlformats.org/drawingml/2006/main" xmlns:r="http://schemas.openxmlformats.org/officeDocument/2006/relationships" xmlns:p="http://schemas.openxmlformats.org/presentationml/2006/main" saveSubsetFonts="1">
+<p:presentation xmlns:a="http://schemas.openxmlformats.org/drawingml/2006/main" xmlns:r="http://schemas.openxmlformats.org/officeDocument/2006/relationships" xmlns:p="http://schemas.openxmlformats.org/presentationml/2006/main" saveSubsetFonts="1" autoCompressPictures="0">
   <p:sldMasterIdLst>
     <p:sldMasterId id="2147483648" r:id="rId1"/>
   </p:sldMasterIdLst>
+  <p:notesMasterIdLst>
+    <p:notesMasterId r:id="rId18"/>
+  </p:notesMasterIdLst>
   <p:sldIdLst>
     <p:sldId id="256" r:id="rId2"/>
     <p:sldId id="257" r:id="rId3"/>
@@ -12,14 +15,15 @@
     <p:sldId id="260" r:id="rId6"/>
     <p:sldId id="261" r:id="rId7"/>
     <p:sldId id="262" r:id="rId8"/>
-    <p:sldId id="263" r:id="rId9"/>
-    <p:sldId id="264" r:id="rId10"/>
-    <p:sldId id="267" r:id="rId11"/>
-    <p:sldId id="268" r:id="rId12"/>
-    <p:sldId id="269" r:id="rId13"/>
-    <p:sldId id="270" r:id="rId14"/>
-    <p:sldId id="265" r:id="rId15"/>
-    <p:sldId id="266" r:id="rId16"/>
+    <p:sldId id="271" r:id="rId9"/>
+    <p:sldId id="263" r:id="rId10"/>
+    <p:sldId id="264" r:id="rId11"/>
+    <p:sldId id="267" r:id="rId12"/>
+    <p:sldId id="268" r:id="rId13"/>
+    <p:sldId id="269" r:id="rId14"/>
+    <p:sldId id="270" r:id="rId15"/>
+    <p:sldId id="265" r:id="rId16"/>
+    <p:sldId id="266" r:id="rId17"/>
   </p:sldIdLst>
   <p:sldSz cx="12192000" cy="6858000"/>
   <p:notesSz cx="6858000" cy="9144000"/>
@@ -118,7 +122,529 @@
       </a:defRPr>
     </a:lvl9pPr>
   </p:defaultTextStyle>
+  <p:extLst>
+    <p:ext uri="{EFAFB233-063F-42B5-8137-9DF3F51BA10A}">
+      <p15:sldGuideLst xmlns:p15="http://schemas.microsoft.com/office/powerpoint/2012/main"/>
+    </p:ext>
+  </p:extLst>
 </p:presentation>
+</file>
+
+<file path=ppt/notesMasters/notesMaster1.xml><?xml version="1.0" encoding="utf-8"?>
+<p:notesMaster xmlns:a="http://schemas.openxmlformats.org/drawingml/2006/main" xmlns:r="http://schemas.openxmlformats.org/officeDocument/2006/relationships" xmlns:p="http://schemas.openxmlformats.org/presentationml/2006/main">
+  <p:cSld>
+    <p:bg>
+      <p:bgRef idx="1001">
+        <a:schemeClr val="bg1"/>
+      </p:bgRef>
+    </p:bg>
+    <p:spTree>
+      <p:nvGrpSpPr>
+        <p:cNvPr id="1" name=""/>
+        <p:cNvGrpSpPr/>
+        <p:nvPr/>
+      </p:nvGrpSpPr>
+      <p:grpSpPr>
+        <a:xfrm>
+          <a:off x="0" y="0"/>
+          <a:ext cx="0" cy="0"/>
+          <a:chOff x="0" y="0"/>
+          <a:chExt cx="0" cy="0"/>
+        </a:xfrm>
+      </p:grpSpPr>
+      <p:sp>
+        <p:nvSpPr>
+          <p:cNvPr id="2" name="页眉占位符 1"/>
+          <p:cNvSpPr>
+            <a:spLocks noGrp="1"/>
+          </p:cNvSpPr>
+          <p:nvPr>
+            <p:ph type="hdr" sz="quarter"/>
+          </p:nvPr>
+        </p:nvSpPr>
+        <p:spPr>
+          <a:xfrm>
+            <a:off x="0" y="0"/>
+            <a:ext cx="2971800" cy="458788"/>
+          </a:xfrm>
+          <a:prstGeom prst="rect">
+            <a:avLst/>
+          </a:prstGeom>
+        </p:spPr>
+        <p:txBody>
+          <a:bodyPr vert="horz" lIns="91440" tIns="45720" rIns="91440" bIns="45720" rtlCol="0"/>
+          <a:lstStyle>
+            <a:lvl1pPr algn="l">
+              <a:defRPr sz="1200"/>
+            </a:lvl1pPr>
+          </a:lstStyle>
+          <a:p>
+            <a:endParaRPr lang="zh-CN" altLang="en-US"/>
+          </a:p>
+        </p:txBody>
+      </p:sp>
+      <p:sp>
+        <p:nvSpPr>
+          <p:cNvPr id="3" name="日期占位符 2"/>
+          <p:cNvSpPr>
+            <a:spLocks noGrp="1"/>
+          </p:cNvSpPr>
+          <p:nvPr>
+            <p:ph type="dt" idx="1"/>
+          </p:nvPr>
+        </p:nvSpPr>
+        <p:spPr>
+          <a:xfrm>
+            <a:off x="3884613" y="0"/>
+            <a:ext cx="2971800" cy="458788"/>
+          </a:xfrm>
+          <a:prstGeom prst="rect">
+            <a:avLst/>
+          </a:prstGeom>
+        </p:spPr>
+        <p:txBody>
+          <a:bodyPr vert="horz" lIns="91440" tIns="45720" rIns="91440" bIns="45720" rtlCol="0"/>
+          <a:lstStyle>
+            <a:lvl1pPr algn="r">
+              <a:defRPr sz="1200"/>
+            </a:lvl1pPr>
+          </a:lstStyle>
+          <a:p>
+            <a:fld id="{FCADBD25-75A8-4A51-9AF0-300401955B5E}" type="datetimeFigureOut">
+              <a:rPr lang="zh-CN" altLang="en-US" smtClean="0"/>
+              <a:t>2026/1/24</a:t>
+            </a:fld>
+            <a:endParaRPr lang="zh-CN" altLang="en-US"/>
+          </a:p>
+        </p:txBody>
+      </p:sp>
+      <p:sp>
+        <p:nvSpPr>
+          <p:cNvPr id="4" name="幻灯片图像占位符 3"/>
+          <p:cNvSpPr>
+            <a:spLocks noGrp="1" noRot="1" noChangeAspect="1"/>
+          </p:cNvSpPr>
+          <p:nvPr>
+            <p:ph type="sldImg" idx="2"/>
+          </p:nvPr>
+        </p:nvSpPr>
+        <p:spPr>
+          <a:xfrm>
+            <a:off x="685800" y="1143000"/>
+            <a:ext cx="5486400" cy="3086100"/>
+          </a:xfrm>
+          <a:prstGeom prst="rect">
+            <a:avLst/>
+          </a:prstGeom>
+          <a:noFill/>
+          <a:ln w="12700">
+            <a:solidFill>
+              <a:prstClr val="black"/>
+            </a:solidFill>
+          </a:ln>
+        </p:spPr>
+        <p:txBody>
+          <a:bodyPr vert="horz" lIns="91440" tIns="45720" rIns="91440" bIns="45720" rtlCol="0" anchor="ctr"/>
+          <a:lstStyle/>
+          <a:p>
+            <a:endParaRPr lang="zh-CN" altLang="en-US"/>
+          </a:p>
+        </p:txBody>
+      </p:sp>
+      <p:sp>
+        <p:nvSpPr>
+          <p:cNvPr id="5" name="备注占位符 4"/>
+          <p:cNvSpPr>
+            <a:spLocks noGrp="1"/>
+          </p:cNvSpPr>
+          <p:nvPr>
+            <p:ph type="body" sz="quarter" idx="3"/>
+          </p:nvPr>
+        </p:nvSpPr>
+        <p:spPr>
+          <a:xfrm>
+            <a:off x="685800" y="4400550"/>
+            <a:ext cx="5486400" cy="3600450"/>
+          </a:xfrm>
+          <a:prstGeom prst="rect">
+            <a:avLst/>
+          </a:prstGeom>
+        </p:spPr>
+        <p:txBody>
+          <a:bodyPr vert="horz" lIns="91440" tIns="45720" rIns="91440" bIns="45720" rtlCol="0"/>
+          <a:lstStyle/>
+          <a:p>
+            <a:pPr lvl="0"/>
+            <a:r>
+              <a:rPr lang="zh-CN" altLang="en-US"/>
+              <a:t>单击此处编辑母版文本样式</a:t>
+            </a:r>
+          </a:p>
+          <a:p>
+            <a:pPr lvl="1"/>
+            <a:r>
+              <a:rPr lang="zh-CN" altLang="en-US"/>
+              <a:t>二级</a:t>
+            </a:r>
+          </a:p>
+          <a:p>
+            <a:pPr lvl="2"/>
+            <a:r>
+              <a:rPr lang="zh-CN" altLang="en-US"/>
+              <a:t>三级</a:t>
+            </a:r>
+          </a:p>
+          <a:p>
+            <a:pPr lvl="3"/>
+            <a:r>
+              <a:rPr lang="zh-CN" altLang="en-US"/>
+              <a:t>四级</a:t>
+            </a:r>
+          </a:p>
+          <a:p>
+            <a:pPr lvl="4"/>
+            <a:r>
+              <a:rPr lang="zh-CN" altLang="en-US"/>
+              <a:t>五级</a:t>
+            </a:r>
+          </a:p>
+        </p:txBody>
+      </p:sp>
+      <p:sp>
+        <p:nvSpPr>
+          <p:cNvPr id="6" name="页脚占位符 5"/>
+          <p:cNvSpPr>
+            <a:spLocks noGrp="1"/>
+          </p:cNvSpPr>
+          <p:nvPr>
+            <p:ph type="ftr" sz="quarter" idx="4"/>
+          </p:nvPr>
+        </p:nvSpPr>
+        <p:spPr>
+          <a:xfrm>
+            <a:off x="0" y="8685213"/>
+            <a:ext cx="2971800" cy="458787"/>
+          </a:xfrm>
+          <a:prstGeom prst="rect">
+            <a:avLst/>
+          </a:prstGeom>
+        </p:spPr>
+        <p:txBody>
+          <a:bodyPr vert="horz" lIns="91440" tIns="45720" rIns="91440" bIns="45720" rtlCol="0" anchor="b"/>
+          <a:lstStyle>
+            <a:lvl1pPr algn="l">
+              <a:defRPr sz="1200"/>
+            </a:lvl1pPr>
+          </a:lstStyle>
+          <a:p>
+            <a:endParaRPr lang="zh-CN" altLang="en-US"/>
+          </a:p>
+        </p:txBody>
+      </p:sp>
+      <p:sp>
+        <p:nvSpPr>
+          <p:cNvPr id="7" name="灯片编号占位符 6"/>
+          <p:cNvSpPr>
+            <a:spLocks noGrp="1"/>
+          </p:cNvSpPr>
+          <p:nvPr>
+            <p:ph type="sldNum" sz="quarter" idx="5"/>
+          </p:nvPr>
+        </p:nvSpPr>
+        <p:spPr>
+          <a:xfrm>
+            <a:off x="3884613" y="8685213"/>
+            <a:ext cx="2971800" cy="458787"/>
+          </a:xfrm>
+          <a:prstGeom prst="rect">
+            <a:avLst/>
+          </a:prstGeom>
+        </p:spPr>
+        <p:txBody>
+          <a:bodyPr vert="horz" lIns="91440" tIns="45720" rIns="91440" bIns="45720" rtlCol="0" anchor="b"/>
+          <a:lstStyle>
+            <a:lvl1pPr algn="r">
+              <a:defRPr sz="1200"/>
+            </a:lvl1pPr>
+          </a:lstStyle>
+          <a:p>
+            <a:fld id="{CB24E8FE-BF3A-4254-AEFE-6ED689301A9F}" type="slidenum">
+              <a:rPr lang="zh-CN" altLang="en-US" smtClean="0"/>
+              <a:t>‹#›</a:t>
+            </a:fld>
+            <a:endParaRPr lang="zh-CN" altLang="en-US"/>
+          </a:p>
+        </p:txBody>
+      </p:sp>
+    </p:spTree>
+    <p:extLst>
+      <p:ext uri="{BB962C8B-B14F-4D97-AF65-F5344CB8AC3E}">
+        <p14:creationId xmlns:p14="http://schemas.microsoft.com/office/powerpoint/2010/main" val="833813684"/>
+      </p:ext>
+    </p:extLst>
+  </p:cSld>
+  <p:clrMap bg1="lt1" tx1="dk1" bg2="lt2" tx2="dk2" accent1="accent1" accent2="accent2" accent3="accent3" accent4="accent4" accent5="accent5" accent6="accent6" hlink="hlink" folHlink="folHlink"/>
+  <p:notesStyle>
+    <a:lvl1pPr marL="0" algn="l" defTabSz="914400" rtl="0" eaLnBrk="1" latinLnBrk="0" hangingPunct="1">
+      <a:defRPr sz="1200" kern="1200">
+        <a:solidFill>
+          <a:schemeClr val="tx1"/>
+        </a:solidFill>
+        <a:latin typeface="+mn-lt"/>
+        <a:ea typeface="+mn-ea"/>
+        <a:cs typeface="+mn-cs"/>
+      </a:defRPr>
+    </a:lvl1pPr>
+    <a:lvl2pPr marL="457200" algn="l" defTabSz="914400" rtl="0" eaLnBrk="1" latinLnBrk="0" hangingPunct="1">
+      <a:defRPr sz="1200" kern="1200">
+        <a:solidFill>
+          <a:schemeClr val="tx1"/>
+        </a:solidFill>
+        <a:latin typeface="+mn-lt"/>
+        <a:ea typeface="+mn-ea"/>
+        <a:cs typeface="+mn-cs"/>
+      </a:defRPr>
+    </a:lvl2pPr>
+    <a:lvl3pPr marL="914400" algn="l" defTabSz="914400" rtl="0" eaLnBrk="1" latinLnBrk="0" hangingPunct="1">
+      <a:defRPr sz="1200" kern="1200">
+        <a:solidFill>
+          <a:schemeClr val="tx1"/>
+        </a:solidFill>
+        <a:latin typeface="+mn-lt"/>
+        <a:ea typeface="+mn-ea"/>
+        <a:cs typeface="+mn-cs"/>
+      </a:defRPr>
+    </a:lvl3pPr>
+    <a:lvl4pPr marL="1371600" algn="l" defTabSz="914400" rtl="0" eaLnBrk="1" latinLnBrk="0" hangingPunct="1">
+      <a:defRPr sz="1200" kern="1200">
+        <a:solidFill>
+          <a:schemeClr val="tx1"/>
+        </a:solidFill>
+        <a:latin typeface="+mn-lt"/>
+        <a:ea typeface="+mn-ea"/>
+        <a:cs typeface="+mn-cs"/>
+      </a:defRPr>
+    </a:lvl4pPr>
+    <a:lvl5pPr marL="1828800" algn="l" defTabSz="914400" rtl="0" eaLnBrk="1" latinLnBrk="0" hangingPunct="1">
+      <a:defRPr sz="1200" kern="1200">
+        <a:solidFill>
+          <a:schemeClr val="tx1"/>
+        </a:solidFill>
+        <a:latin typeface="+mn-lt"/>
+        <a:ea typeface="+mn-ea"/>
+        <a:cs typeface="+mn-cs"/>
+      </a:defRPr>
+    </a:lvl5pPr>
+    <a:lvl6pPr marL="2286000" algn="l" defTabSz="914400" rtl="0" eaLnBrk="1" latinLnBrk="0" hangingPunct="1">
+      <a:defRPr sz="1200" kern="1200">
+        <a:solidFill>
+          <a:schemeClr val="tx1"/>
+        </a:solidFill>
+        <a:latin typeface="+mn-lt"/>
+        <a:ea typeface="+mn-ea"/>
+        <a:cs typeface="+mn-cs"/>
+      </a:defRPr>
+    </a:lvl6pPr>
+    <a:lvl7pPr marL="2743200" algn="l" defTabSz="914400" rtl="0" eaLnBrk="1" latinLnBrk="0" hangingPunct="1">
+      <a:defRPr sz="1200" kern="1200">
+        <a:solidFill>
+          <a:schemeClr val="tx1"/>
+        </a:solidFill>
+        <a:latin typeface="+mn-lt"/>
+        <a:ea typeface="+mn-ea"/>
+        <a:cs typeface="+mn-cs"/>
+      </a:defRPr>
+    </a:lvl7pPr>
+    <a:lvl8pPr marL="3200400" algn="l" defTabSz="914400" rtl="0" eaLnBrk="1" latinLnBrk="0" hangingPunct="1">
+      <a:defRPr sz="1200" kern="1200">
+        <a:solidFill>
+          <a:schemeClr val="tx1"/>
+        </a:solidFill>
+        <a:latin typeface="+mn-lt"/>
+        <a:ea typeface="+mn-ea"/>
+        <a:cs typeface="+mn-cs"/>
+      </a:defRPr>
+    </a:lvl8pPr>
+    <a:lvl9pPr marL="3657600" algn="l" defTabSz="914400" rtl="0" eaLnBrk="1" latinLnBrk="0" hangingPunct="1">
+      <a:defRPr sz="1200" kern="1200">
+        <a:solidFill>
+          <a:schemeClr val="tx1"/>
+        </a:solidFill>
+        <a:latin typeface="+mn-lt"/>
+        <a:ea typeface="+mn-ea"/>
+        <a:cs typeface="+mn-cs"/>
+      </a:defRPr>
+    </a:lvl9pPr>
+  </p:notesStyle>
+</p:notesMaster>
+</file>
+
+<file path=ppt/notesSlides/notesSlide1.xml><?xml version="1.0" encoding="utf-8"?>
+<p:notes xmlns:a="http://schemas.openxmlformats.org/drawingml/2006/main" xmlns:r="http://schemas.openxmlformats.org/officeDocument/2006/relationships" xmlns:p="http://schemas.openxmlformats.org/presentationml/2006/main">
+  <p:cSld>
+    <p:spTree>
+      <p:nvGrpSpPr>
+        <p:cNvPr id="1" name=""/>
+        <p:cNvGrpSpPr/>
+        <p:nvPr/>
+      </p:nvGrpSpPr>
+      <p:grpSpPr>
+        <a:xfrm>
+          <a:off x="0" y="0"/>
+          <a:ext cx="0" cy="0"/>
+          <a:chOff x="0" y="0"/>
+          <a:chExt cx="0" cy="0"/>
+        </a:xfrm>
+      </p:grpSpPr>
+      <p:sp>
+        <p:nvSpPr>
+          <p:cNvPr id="2" name="幻灯片图像占位符 1"/>
+          <p:cNvSpPr>
+            <a:spLocks noGrp="1" noRot="1" noChangeAspect="1"/>
+          </p:cNvSpPr>
+          <p:nvPr>
+            <p:ph type="sldImg"/>
+          </p:nvPr>
+        </p:nvSpPr>
+        <p:spPr/>
+      </p:sp>
+      <p:sp>
+        <p:nvSpPr>
+          <p:cNvPr id="3" name="备注占位符 2"/>
+          <p:cNvSpPr>
+            <a:spLocks noGrp="1"/>
+          </p:cNvSpPr>
+          <p:nvPr>
+            <p:ph type="body" idx="1"/>
+          </p:nvPr>
+        </p:nvSpPr>
+        <p:spPr/>
+        <p:txBody>
+          <a:bodyPr/>
+          <a:lstStyle/>
+          <a:p>
+            <a:endParaRPr lang="zh-CN" altLang="en-US" dirty="0"/>
+          </a:p>
+        </p:txBody>
+      </p:sp>
+      <p:sp>
+        <p:nvSpPr>
+          <p:cNvPr id="4" name="灯片编号占位符 3"/>
+          <p:cNvSpPr>
+            <a:spLocks noGrp="1"/>
+          </p:cNvSpPr>
+          <p:nvPr>
+            <p:ph type="sldNum" sz="quarter" idx="5"/>
+          </p:nvPr>
+        </p:nvSpPr>
+        <p:spPr/>
+        <p:txBody>
+          <a:bodyPr/>
+          <a:lstStyle/>
+          <a:p>
+            <a:fld id="{CB24E8FE-BF3A-4254-AEFE-6ED689301A9F}" type="slidenum">
+              <a:rPr lang="zh-CN" altLang="en-US" smtClean="0"/>
+              <a:t>2</a:t>
+            </a:fld>
+            <a:endParaRPr lang="zh-CN" altLang="en-US"/>
+          </a:p>
+        </p:txBody>
+      </p:sp>
+    </p:spTree>
+    <p:extLst>
+      <p:ext uri="{BB962C8B-B14F-4D97-AF65-F5344CB8AC3E}">
+        <p14:creationId xmlns:p14="http://schemas.microsoft.com/office/powerpoint/2010/main" val="3017399837"/>
+      </p:ext>
+    </p:extLst>
+  </p:cSld>
+  <p:clrMapOvr>
+    <a:masterClrMapping/>
+  </p:clrMapOvr>
+</p:notes>
+</file>
+
+<file path=ppt/notesSlides/notesSlide2.xml><?xml version="1.0" encoding="utf-8"?>
+<p:notes xmlns:a="http://schemas.openxmlformats.org/drawingml/2006/main" xmlns:r="http://schemas.openxmlformats.org/officeDocument/2006/relationships" xmlns:p="http://schemas.openxmlformats.org/presentationml/2006/main">
+  <p:cSld>
+    <p:spTree>
+      <p:nvGrpSpPr>
+        <p:cNvPr id="1" name=""/>
+        <p:cNvGrpSpPr/>
+        <p:nvPr/>
+      </p:nvGrpSpPr>
+      <p:grpSpPr>
+        <a:xfrm>
+          <a:off x="0" y="0"/>
+          <a:ext cx="0" cy="0"/>
+          <a:chOff x="0" y="0"/>
+          <a:chExt cx="0" cy="0"/>
+        </a:xfrm>
+      </p:grpSpPr>
+      <p:sp>
+        <p:nvSpPr>
+          <p:cNvPr id="2" name="幻灯片图像占位符 1"/>
+          <p:cNvSpPr>
+            <a:spLocks noGrp="1" noRot="1" noChangeAspect="1"/>
+          </p:cNvSpPr>
+          <p:nvPr>
+            <p:ph type="sldImg"/>
+          </p:nvPr>
+        </p:nvSpPr>
+        <p:spPr/>
+      </p:sp>
+      <p:sp>
+        <p:nvSpPr>
+          <p:cNvPr id="3" name="备注占位符 2"/>
+          <p:cNvSpPr>
+            <a:spLocks noGrp="1"/>
+          </p:cNvSpPr>
+          <p:nvPr>
+            <p:ph type="body" idx="1"/>
+          </p:nvPr>
+        </p:nvSpPr>
+        <p:spPr/>
+        <p:txBody>
+          <a:bodyPr/>
+          <a:lstStyle/>
+          <a:p>
+            <a:endParaRPr lang="zh-CN" altLang="en-US" dirty="0"/>
+          </a:p>
+        </p:txBody>
+      </p:sp>
+      <p:sp>
+        <p:nvSpPr>
+          <p:cNvPr id="4" name="灯片编号占位符 3"/>
+          <p:cNvSpPr>
+            <a:spLocks noGrp="1"/>
+          </p:cNvSpPr>
+          <p:nvPr>
+            <p:ph type="sldNum" sz="quarter" idx="5"/>
+          </p:nvPr>
+        </p:nvSpPr>
+        <p:spPr/>
+        <p:txBody>
+          <a:bodyPr/>
+          <a:lstStyle/>
+          <a:p>
+            <a:fld id="{CB24E8FE-BF3A-4254-AEFE-6ED689301A9F}" type="slidenum">
+              <a:rPr lang="zh-CN" altLang="en-US" smtClean="0"/>
+              <a:t>8</a:t>
+            </a:fld>
+            <a:endParaRPr lang="zh-CN" altLang="en-US"/>
+          </a:p>
+        </p:txBody>
+      </p:sp>
+    </p:spTree>
+    <p:extLst>
+      <p:ext uri="{BB962C8B-B14F-4D97-AF65-F5344CB8AC3E}">
+        <p14:creationId xmlns:p14="http://schemas.microsoft.com/office/powerpoint/2010/main" val="3125942945"/>
+      </p:ext>
+    </p:extLst>
+  </p:cSld>
+  <p:clrMapOvr>
+    <a:masterClrMapping/>
+  </p:clrMapOvr>
+</p:notes>
 </file>
 
 <file path=ppt/slideLayouts/slideLayout1.xml><?xml version="1.0" encoding="utf-8"?>
@@ -268,7 +794,7 @@
           <a:p>
             <a:fld id="{40F70359-C398-46F3-85A7-616FAE599AC8}" type="datetimeFigureOut">
               <a:rPr lang="zh-CN" altLang="en-US" smtClean="0"/>
-              <a:t>2026/1/4</a:t>
+              <a:t>2026/1/24</a:t>
             </a:fld>
             <a:endParaRPr lang="zh-CN" altLang="en-US"/>
           </a:p>
@@ -466,7 +992,7 @@
           <a:p>
             <a:fld id="{40F70359-C398-46F3-85A7-616FAE599AC8}" type="datetimeFigureOut">
               <a:rPr lang="zh-CN" altLang="en-US" smtClean="0"/>
-              <a:t>2026/1/4</a:t>
+              <a:t>2026/1/24</a:t>
             </a:fld>
             <a:endParaRPr lang="zh-CN" altLang="en-US"/>
           </a:p>
@@ -674,7 +1200,7 @@
           <a:p>
             <a:fld id="{40F70359-C398-46F3-85A7-616FAE599AC8}" type="datetimeFigureOut">
               <a:rPr lang="zh-CN" altLang="en-US" smtClean="0"/>
-              <a:t>2026/1/4</a:t>
+              <a:t>2026/1/24</a:t>
             </a:fld>
             <a:endParaRPr lang="zh-CN" altLang="en-US"/>
           </a:p>
@@ -872,7 +1398,7 @@
           <a:p>
             <a:fld id="{40F70359-C398-46F3-85A7-616FAE599AC8}" type="datetimeFigureOut">
               <a:rPr lang="zh-CN" altLang="en-US" smtClean="0"/>
-              <a:t>2026/1/4</a:t>
+              <a:t>2026/1/24</a:t>
             </a:fld>
             <a:endParaRPr lang="zh-CN" altLang="en-US"/>
           </a:p>
@@ -1147,7 +1673,7 @@
           <a:p>
             <a:fld id="{40F70359-C398-46F3-85A7-616FAE599AC8}" type="datetimeFigureOut">
               <a:rPr lang="zh-CN" altLang="en-US" smtClean="0"/>
-              <a:t>2026/1/4</a:t>
+              <a:t>2026/1/24</a:t>
             </a:fld>
             <a:endParaRPr lang="zh-CN" altLang="en-US"/>
           </a:p>
@@ -1412,7 +1938,7 @@
           <a:p>
             <a:fld id="{40F70359-C398-46F3-85A7-616FAE599AC8}" type="datetimeFigureOut">
               <a:rPr lang="zh-CN" altLang="en-US" smtClean="0"/>
-              <a:t>2026/1/4</a:t>
+              <a:t>2026/1/24</a:t>
             </a:fld>
             <a:endParaRPr lang="zh-CN" altLang="en-US"/>
           </a:p>
@@ -1824,7 +2350,7 @@
           <a:p>
             <a:fld id="{40F70359-C398-46F3-85A7-616FAE599AC8}" type="datetimeFigureOut">
               <a:rPr lang="zh-CN" altLang="en-US" smtClean="0"/>
-              <a:t>2026/1/4</a:t>
+              <a:t>2026/1/24</a:t>
             </a:fld>
             <a:endParaRPr lang="zh-CN" altLang="en-US"/>
           </a:p>
@@ -1965,7 +2491,7 @@
           <a:p>
             <a:fld id="{40F70359-C398-46F3-85A7-616FAE599AC8}" type="datetimeFigureOut">
               <a:rPr lang="zh-CN" altLang="en-US" smtClean="0"/>
-              <a:t>2026/1/4</a:t>
+              <a:t>2026/1/24</a:t>
             </a:fld>
             <a:endParaRPr lang="zh-CN" altLang="en-US"/>
           </a:p>
@@ -2078,7 +2604,7 @@
           <a:p>
             <a:fld id="{40F70359-C398-46F3-85A7-616FAE599AC8}" type="datetimeFigureOut">
               <a:rPr lang="zh-CN" altLang="en-US" smtClean="0"/>
-              <a:t>2026/1/4</a:t>
+              <a:t>2026/1/24</a:t>
             </a:fld>
             <a:endParaRPr lang="zh-CN" altLang="en-US"/>
           </a:p>
@@ -2389,7 +2915,7 @@
           <a:p>
             <a:fld id="{40F70359-C398-46F3-85A7-616FAE599AC8}" type="datetimeFigureOut">
               <a:rPr lang="zh-CN" altLang="en-US" smtClean="0"/>
-              <a:t>2026/1/4</a:t>
+              <a:t>2026/1/24</a:t>
             </a:fld>
             <a:endParaRPr lang="zh-CN" altLang="en-US"/>
           </a:p>
@@ -2677,7 +3203,7 @@
           <a:p>
             <a:fld id="{40F70359-C398-46F3-85A7-616FAE599AC8}" type="datetimeFigureOut">
               <a:rPr lang="zh-CN" altLang="en-US" smtClean="0"/>
-              <a:t>2026/1/4</a:t>
+              <a:t>2026/1/24</a:t>
             </a:fld>
             <a:endParaRPr lang="zh-CN" altLang="en-US"/>
           </a:p>
@@ -2918,7 +3444,7 @@
           <a:p>
             <a:fld id="{40F70359-C398-46F3-85A7-616FAE599AC8}" type="datetimeFigureOut">
               <a:rPr lang="zh-CN" altLang="en-US" smtClean="0"/>
-              <a:t>2026/1/4</a:t>
+              <a:t>2026/1/24</a:t>
             </a:fld>
             <a:endParaRPr lang="zh-CN" altLang="en-US"/>
           </a:p>
@@ -3335,6 +3861,96 @@
           <a:chExt cx="0" cy="0"/>
         </a:xfrm>
       </p:grpSpPr>
+      <p:pic>
+        <p:nvPicPr>
+          <p:cNvPr id="3" name="图片 2">
+            <a:extLst>
+              <a:ext uri="{FF2B5EF4-FFF2-40B4-BE49-F238E27FC236}">
+                <a16:creationId xmlns:a16="http://schemas.microsoft.com/office/drawing/2014/main" id="{FB4F1480-C5D1-4475-A6F7-00992A646712}"/>
+              </a:ext>
+            </a:extLst>
+          </p:cNvPr>
+          <p:cNvPicPr>
+            <a:picLocks noChangeAspect="1"/>
+          </p:cNvPicPr>
+          <p:nvPr/>
+        </p:nvPicPr>
+        <p:blipFill>
+          <a:blip r:embed="rId2"/>
+          <a:stretch>
+            <a:fillRect/>
+          </a:stretch>
+        </p:blipFill>
+        <p:spPr>
+          <a:xfrm>
+            <a:off x="-2224035" y="2310428"/>
+            <a:ext cx="5957835" cy="3380361"/>
+          </a:xfrm>
+          <a:prstGeom prst="rect">
+            <a:avLst/>
+          </a:prstGeom>
+        </p:spPr>
+      </p:pic>
+      <p:pic>
+        <p:nvPicPr>
+          <p:cNvPr id="5" name="图片 4">
+            <a:extLst>
+              <a:ext uri="{FF2B5EF4-FFF2-40B4-BE49-F238E27FC236}">
+                <a16:creationId xmlns:a16="http://schemas.microsoft.com/office/drawing/2014/main" id="{BEF4B735-11FE-4B0D-8355-729CFF6165CF}"/>
+              </a:ext>
+            </a:extLst>
+          </p:cNvPr>
+          <p:cNvPicPr>
+            <a:picLocks noChangeAspect="1"/>
+          </p:cNvPicPr>
+          <p:nvPr/>
+        </p:nvPicPr>
+        <p:blipFill>
+          <a:blip r:embed="rId3"/>
+          <a:stretch>
+            <a:fillRect/>
+          </a:stretch>
+        </p:blipFill>
+        <p:spPr>
+          <a:xfrm>
+            <a:off x="3166516" y="748223"/>
+            <a:ext cx="4910686" cy="2576002"/>
+          </a:xfrm>
+          <a:prstGeom prst="rect">
+            <a:avLst/>
+          </a:prstGeom>
+        </p:spPr>
+      </p:pic>
+      <p:pic>
+        <p:nvPicPr>
+          <p:cNvPr id="7" name="图片 6">
+            <a:extLst>
+              <a:ext uri="{FF2B5EF4-FFF2-40B4-BE49-F238E27FC236}">
+                <a16:creationId xmlns:a16="http://schemas.microsoft.com/office/drawing/2014/main" id="{845EAF78-5A06-47E5-BD64-ECCEC1A946C4}"/>
+              </a:ext>
+            </a:extLst>
+          </p:cNvPr>
+          <p:cNvPicPr>
+            <a:picLocks noChangeAspect="1"/>
+          </p:cNvPicPr>
+          <p:nvPr/>
+        </p:nvPicPr>
+        <p:blipFill>
+          <a:blip r:embed="rId4"/>
+          <a:stretch>
+            <a:fillRect/>
+          </a:stretch>
+        </p:blipFill>
+        <p:spPr>
+          <a:xfrm>
+            <a:off x="3435872" y="3783769"/>
+            <a:ext cx="4910686" cy="2576002"/>
+          </a:xfrm>
+          <a:prstGeom prst="rect">
+            <a:avLst/>
+          </a:prstGeom>
+        </p:spPr>
+      </p:pic>
     </p:spTree>
     <p:extLst>
       <p:ext uri="{BB962C8B-B14F-4D97-AF65-F5344CB8AC3E}">
@@ -3368,7 +3984,7 @@
     </p:spTree>
     <p:extLst>
       <p:ext uri="{BB962C8B-B14F-4D97-AF65-F5344CB8AC3E}">
-        <p14:creationId xmlns:p14="http://schemas.microsoft.com/office/powerpoint/2010/main" val="3702617261"/>
+        <p14:creationId xmlns:p14="http://schemas.microsoft.com/office/powerpoint/2010/main" val="1524911457"/>
       </p:ext>
     </p:extLst>
   </p:cSld>
@@ -3398,7 +4014,7 @@
     </p:spTree>
     <p:extLst>
       <p:ext uri="{BB962C8B-B14F-4D97-AF65-F5344CB8AC3E}">
-        <p14:creationId xmlns:p14="http://schemas.microsoft.com/office/powerpoint/2010/main" val="3762803038"/>
+        <p14:creationId xmlns:p14="http://schemas.microsoft.com/office/powerpoint/2010/main" val="3702617261"/>
       </p:ext>
     </p:extLst>
   </p:cSld>
@@ -3428,7 +4044,7 @@
     </p:spTree>
     <p:extLst>
       <p:ext uri="{BB962C8B-B14F-4D97-AF65-F5344CB8AC3E}">
-        <p14:creationId xmlns:p14="http://schemas.microsoft.com/office/powerpoint/2010/main" val="219741257"/>
+        <p14:creationId xmlns:p14="http://schemas.microsoft.com/office/powerpoint/2010/main" val="3762803038"/>
       </p:ext>
     </p:extLst>
   </p:cSld>
@@ -3458,7 +4074,7 @@
     </p:spTree>
     <p:extLst>
       <p:ext uri="{BB962C8B-B14F-4D97-AF65-F5344CB8AC3E}">
-        <p14:creationId xmlns:p14="http://schemas.microsoft.com/office/powerpoint/2010/main" val="1229261825"/>
+        <p14:creationId xmlns:p14="http://schemas.microsoft.com/office/powerpoint/2010/main" val="219741257"/>
       </p:ext>
     </p:extLst>
   </p:cSld>
@@ -3488,6 +4104,36 @@
     </p:spTree>
     <p:extLst>
       <p:ext uri="{BB962C8B-B14F-4D97-AF65-F5344CB8AC3E}">
+        <p14:creationId xmlns:p14="http://schemas.microsoft.com/office/powerpoint/2010/main" val="1229261825"/>
+      </p:ext>
+    </p:extLst>
+  </p:cSld>
+  <p:clrMapOvr>
+    <a:masterClrMapping/>
+  </p:clrMapOvr>
+</p:sld>
+</file>
+
+<file path=ppt/slides/slide15.xml><?xml version="1.0" encoding="utf-8"?>
+<p:sld xmlns:a="http://schemas.openxmlformats.org/drawingml/2006/main" xmlns:r="http://schemas.openxmlformats.org/officeDocument/2006/relationships" xmlns:p="http://schemas.openxmlformats.org/presentationml/2006/main">
+  <p:cSld>
+    <p:spTree>
+      <p:nvGrpSpPr>
+        <p:cNvPr id="1" name=""/>
+        <p:cNvGrpSpPr/>
+        <p:nvPr/>
+      </p:nvGrpSpPr>
+      <p:grpSpPr>
+        <a:xfrm>
+          <a:off x="0" y="0"/>
+          <a:ext cx="0" cy="0"/>
+          <a:chOff x="0" y="0"/>
+          <a:chExt cx="0" cy="0"/>
+        </a:xfrm>
+      </p:grpSpPr>
+    </p:spTree>
+    <p:extLst>
+      <p:ext uri="{BB962C8B-B14F-4D97-AF65-F5344CB8AC3E}">
         <p14:creationId xmlns:p14="http://schemas.microsoft.com/office/powerpoint/2010/main" val="3825719821"/>
       </p:ext>
     </p:extLst>
@@ -3498,7 +4144,7 @@
 </p:sld>
 </file>
 
-<file path=ppt/slides/slide15.xml><?xml version="1.0" encoding="utf-8"?>
+<file path=ppt/slides/slide16.xml><?xml version="1.0" encoding="utf-8"?>
 <p:sld xmlns:a="http://schemas.openxmlformats.org/drawingml/2006/main" xmlns:r="http://schemas.openxmlformats.org/officeDocument/2006/relationships" xmlns:p="http://schemas.openxmlformats.org/presentationml/2006/main">
   <p:cSld>
     <p:spTree>
@@ -3545,6 +4191,629 @@
           <a:chExt cx="0" cy="0"/>
         </a:xfrm>
       </p:grpSpPr>
+      <p:grpSp>
+        <p:nvGrpSpPr>
+          <p:cNvPr id="12" name="组合 11">
+            <a:extLst>
+              <a:ext uri="{FF2B5EF4-FFF2-40B4-BE49-F238E27FC236}">
+                <a16:creationId xmlns:a16="http://schemas.microsoft.com/office/drawing/2014/main" id="{B9CF1619-B9EF-461D-BA72-E1D1E601DF68}"/>
+              </a:ext>
+            </a:extLst>
+          </p:cNvPr>
+          <p:cNvGrpSpPr/>
+          <p:nvPr/>
+        </p:nvGrpSpPr>
+        <p:grpSpPr>
+          <a:xfrm>
+            <a:off x="491485" y="957771"/>
+            <a:ext cx="11310513" cy="5331078"/>
+            <a:chOff x="491485" y="957771"/>
+            <a:chExt cx="11310513" cy="5331078"/>
+          </a:xfrm>
+        </p:grpSpPr>
+        <p:pic>
+          <p:nvPicPr>
+            <p:cNvPr id="6" name="图片 5">
+              <a:extLst>
+                <a:ext uri="{FF2B5EF4-FFF2-40B4-BE49-F238E27FC236}">
+                  <a16:creationId xmlns:a16="http://schemas.microsoft.com/office/drawing/2014/main" id="{5CA70656-2E95-45D8-AF32-C09FA64D889F}"/>
+                </a:ext>
+              </a:extLst>
+            </p:cNvPr>
+            <p:cNvPicPr>
+              <a:picLocks noChangeAspect="1"/>
+            </p:cNvPicPr>
+            <p:nvPr/>
+          </p:nvPicPr>
+          <p:blipFill>
+            <a:blip r:embed="rId3">
+              <a:clrChange>
+                <a:clrFrom>
+                  <a:srgbClr val="FFFFFF"/>
+                </a:clrFrom>
+                <a:clrTo>
+                  <a:srgbClr val="FFFFFF">
+                    <a:alpha val="0"/>
+                  </a:srgbClr>
+                </a:clrTo>
+              </a:clrChange>
+            </a:blip>
+            <a:stretch>
+              <a:fillRect/>
+            </a:stretch>
+          </p:blipFill>
+          <p:spPr>
+            <a:xfrm>
+              <a:off x="8679389" y="1116818"/>
+              <a:ext cx="3122609" cy="2520000"/>
+            </a:xfrm>
+            <a:prstGeom prst="rect">
+              <a:avLst/>
+            </a:prstGeom>
+          </p:spPr>
+        </p:pic>
+        <p:pic>
+          <p:nvPicPr>
+            <p:cNvPr id="9" name="图片 8">
+              <a:extLst>
+                <a:ext uri="{FF2B5EF4-FFF2-40B4-BE49-F238E27FC236}">
+                  <a16:creationId xmlns:a16="http://schemas.microsoft.com/office/drawing/2014/main" id="{18EC4BB9-2F04-4321-AA03-9FF74510CE90}"/>
+                </a:ext>
+              </a:extLst>
+            </p:cNvPr>
+            <p:cNvPicPr>
+              <a:picLocks noChangeAspect="1"/>
+            </p:cNvPicPr>
+            <p:nvPr/>
+          </p:nvPicPr>
+          <p:blipFill>
+            <a:blip r:embed="rId4">
+              <a:clrChange>
+                <a:clrFrom>
+                  <a:srgbClr val="FFFFFF"/>
+                </a:clrFrom>
+                <a:clrTo>
+                  <a:srgbClr val="FFFFFF">
+                    <a:alpha val="0"/>
+                  </a:srgbClr>
+                </a:clrTo>
+              </a:clrChange>
+              <a:extLst>
+                <a:ext uri="{28A0092B-C50C-407E-A947-70E740481C1C}">
+                  <a14:useLocalDpi xmlns:a14="http://schemas.microsoft.com/office/drawing/2010/main" val="0"/>
+                </a:ext>
+              </a:extLst>
+            </a:blip>
+            <a:stretch>
+              <a:fillRect/>
+            </a:stretch>
+          </p:blipFill>
+          <p:spPr>
+            <a:xfrm>
+              <a:off x="4980048" y="1116818"/>
+              <a:ext cx="3454256" cy="2520000"/>
+            </a:xfrm>
+            <a:prstGeom prst="rect">
+              <a:avLst/>
+            </a:prstGeom>
+          </p:spPr>
+        </p:pic>
+        <p:pic>
+          <p:nvPicPr>
+            <p:cNvPr id="11" name="图片 10">
+              <a:extLst>
+                <a:ext uri="{FF2B5EF4-FFF2-40B4-BE49-F238E27FC236}">
+                  <a16:creationId xmlns:a16="http://schemas.microsoft.com/office/drawing/2014/main" id="{190AB136-068F-49CB-BBA6-B055910E96F9}"/>
+                </a:ext>
+              </a:extLst>
+            </p:cNvPr>
+            <p:cNvPicPr>
+              <a:picLocks noChangeAspect="1"/>
+            </p:cNvPicPr>
+            <p:nvPr/>
+          </p:nvPicPr>
+          <p:blipFill>
+            <a:blip r:embed="rId5">
+              <a:clrChange>
+                <a:clrFrom>
+                  <a:srgbClr val="FFFFFF"/>
+                </a:clrFrom>
+                <a:clrTo>
+                  <a:srgbClr val="FFFFFF">
+                    <a:alpha val="0"/>
+                  </a:srgbClr>
+                </a:clrTo>
+              </a:clrChange>
+              <a:extLst>
+                <a:ext uri="{28A0092B-C50C-407E-A947-70E740481C1C}">
+                  <a14:useLocalDpi xmlns:a14="http://schemas.microsoft.com/office/drawing/2010/main" val="0"/>
+                </a:ext>
+              </a:extLst>
+            </a:blip>
+            <a:stretch>
+              <a:fillRect/>
+            </a:stretch>
+          </p:blipFill>
+          <p:spPr>
+            <a:xfrm>
+              <a:off x="4980048" y="3768849"/>
+              <a:ext cx="3454256" cy="2520000"/>
+            </a:xfrm>
+            <a:prstGeom prst="rect">
+              <a:avLst/>
+            </a:prstGeom>
+          </p:spPr>
+        </p:pic>
+        <p:sp>
+          <p:nvSpPr>
+            <p:cNvPr id="19" name="文本框 18">
+              <a:extLst>
+                <a:ext uri="{FF2B5EF4-FFF2-40B4-BE49-F238E27FC236}">
+                  <a16:creationId xmlns:a16="http://schemas.microsoft.com/office/drawing/2014/main" id="{D37D89AE-1459-45B1-A185-1D1978A89C35}"/>
+                </a:ext>
+              </a:extLst>
+            </p:cNvPr>
+            <p:cNvSpPr txBox="1"/>
+            <p:nvPr/>
+          </p:nvSpPr>
+          <p:spPr>
+            <a:xfrm>
+              <a:off x="4817193" y="957771"/>
+              <a:ext cx="320922" cy="338554"/>
+            </a:xfrm>
+            <a:prstGeom prst="rect">
+              <a:avLst/>
+            </a:prstGeom>
+            <a:noFill/>
+          </p:spPr>
+          <p:txBody>
+            <a:bodyPr wrap="none" rtlCol="0">
+              <a:spAutoFit/>
+            </a:bodyPr>
+            <a:lstStyle/>
+            <a:p>
+              <a:r>
+                <a:rPr lang="en-US" altLang="zh-CN" sz="1600" b="1" dirty="0">
+                  <a:latin typeface="微软雅黑" panose="020B0503020204020204" pitchFamily="34" charset="-122"/>
+                  <a:ea typeface="微软雅黑" panose="020B0503020204020204" pitchFamily="34" charset="-122"/>
+                </a:rPr>
+                <a:t>b</a:t>
+              </a:r>
+              <a:endParaRPr lang="zh-CN" altLang="en-US" sz="1600" b="1" dirty="0">
+                <a:latin typeface="微软雅黑" panose="020B0503020204020204" pitchFamily="34" charset="-122"/>
+                <a:ea typeface="微软雅黑" panose="020B0503020204020204" pitchFamily="34" charset="-122"/>
+              </a:endParaRPr>
+            </a:p>
+          </p:txBody>
+        </p:sp>
+        <p:sp>
+          <p:nvSpPr>
+            <p:cNvPr id="20" name="文本框 19">
+              <a:extLst>
+                <a:ext uri="{FF2B5EF4-FFF2-40B4-BE49-F238E27FC236}">
+                  <a16:creationId xmlns:a16="http://schemas.microsoft.com/office/drawing/2014/main" id="{556978BD-0882-4417-BDEE-91B8D1D3B004}"/>
+                </a:ext>
+              </a:extLst>
+            </p:cNvPr>
+            <p:cNvSpPr txBox="1"/>
+            <p:nvPr/>
+          </p:nvSpPr>
+          <p:spPr>
+            <a:xfrm>
+              <a:off x="4834826" y="3571484"/>
+              <a:ext cx="290464" cy="338554"/>
+            </a:xfrm>
+            <a:prstGeom prst="rect">
+              <a:avLst/>
+            </a:prstGeom>
+            <a:noFill/>
+          </p:spPr>
+          <p:txBody>
+            <a:bodyPr wrap="none" rtlCol="0">
+              <a:spAutoFit/>
+            </a:bodyPr>
+            <a:lstStyle/>
+            <a:p>
+              <a:r>
+                <a:rPr lang="en-US" altLang="zh-CN" sz="1600" b="1" dirty="0">
+                  <a:latin typeface="微软雅黑" panose="020B0503020204020204" pitchFamily="34" charset="-122"/>
+                  <a:ea typeface="微软雅黑" panose="020B0503020204020204" pitchFamily="34" charset="-122"/>
+                </a:rPr>
+                <a:t>c</a:t>
+              </a:r>
+              <a:endParaRPr lang="zh-CN" altLang="en-US" sz="1600" b="1" dirty="0">
+                <a:latin typeface="微软雅黑" panose="020B0503020204020204" pitchFamily="34" charset="-122"/>
+                <a:ea typeface="微软雅黑" panose="020B0503020204020204" pitchFamily="34" charset="-122"/>
+              </a:endParaRPr>
+            </a:p>
+          </p:txBody>
+        </p:sp>
+        <p:sp>
+          <p:nvSpPr>
+            <p:cNvPr id="21" name="文本框 20">
+              <a:extLst>
+                <a:ext uri="{FF2B5EF4-FFF2-40B4-BE49-F238E27FC236}">
+                  <a16:creationId xmlns:a16="http://schemas.microsoft.com/office/drawing/2014/main" id="{FB6975C1-DB39-46E8-B75D-12B1E881D472}"/>
+                </a:ext>
+              </a:extLst>
+            </p:cNvPr>
+            <p:cNvSpPr txBox="1"/>
+            <p:nvPr/>
+          </p:nvSpPr>
+          <p:spPr>
+            <a:xfrm>
+              <a:off x="8280267" y="957771"/>
+              <a:ext cx="320922" cy="338554"/>
+            </a:xfrm>
+            <a:prstGeom prst="rect">
+              <a:avLst/>
+            </a:prstGeom>
+            <a:noFill/>
+          </p:spPr>
+          <p:txBody>
+            <a:bodyPr wrap="none" rtlCol="0">
+              <a:spAutoFit/>
+            </a:bodyPr>
+            <a:lstStyle/>
+            <a:p>
+              <a:r>
+                <a:rPr lang="en-US" altLang="zh-CN" sz="1600" b="1" dirty="0">
+                  <a:latin typeface="微软雅黑" panose="020B0503020204020204" pitchFamily="34" charset="-122"/>
+                  <a:ea typeface="微软雅黑" panose="020B0503020204020204" pitchFamily="34" charset="-122"/>
+                </a:rPr>
+                <a:t>d</a:t>
+              </a:r>
+              <a:endParaRPr lang="zh-CN" altLang="en-US" sz="1600" b="1" dirty="0">
+                <a:latin typeface="微软雅黑" panose="020B0503020204020204" pitchFamily="34" charset="-122"/>
+                <a:ea typeface="微软雅黑" panose="020B0503020204020204" pitchFamily="34" charset="-122"/>
+              </a:endParaRPr>
+            </a:p>
+          </p:txBody>
+        </p:sp>
+        <p:sp>
+          <p:nvSpPr>
+            <p:cNvPr id="22" name="文本框 21">
+              <a:extLst>
+                <a:ext uri="{FF2B5EF4-FFF2-40B4-BE49-F238E27FC236}">
+                  <a16:creationId xmlns:a16="http://schemas.microsoft.com/office/drawing/2014/main" id="{ECC91E1C-751A-448F-A008-0B65077A0DF8}"/>
+                </a:ext>
+              </a:extLst>
+            </p:cNvPr>
+            <p:cNvSpPr txBox="1"/>
+            <p:nvPr/>
+          </p:nvSpPr>
+          <p:spPr>
+            <a:xfrm>
+              <a:off x="8374497" y="3570580"/>
+              <a:ext cx="304892" cy="338554"/>
+            </a:xfrm>
+            <a:prstGeom prst="rect">
+              <a:avLst/>
+            </a:prstGeom>
+            <a:noFill/>
+          </p:spPr>
+          <p:txBody>
+            <a:bodyPr wrap="none" rtlCol="0">
+              <a:spAutoFit/>
+            </a:bodyPr>
+            <a:lstStyle/>
+            <a:p>
+              <a:r>
+                <a:rPr lang="en-US" altLang="zh-CN" sz="1600" b="1" dirty="0">
+                  <a:latin typeface="微软雅黑" panose="020B0503020204020204" pitchFamily="34" charset="-122"/>
+                  <a:ea typeface="微软雅黑" panose="020B0503020204020204" pitchFamily="34" charset="-122"/>
+                </a:rPr>
+                <a:t>e</a:t>
+              </a:r>
+              <a:endParaRPr lang="zh-CN" altLang="en-US" sz="1600" b="1" dirty="0">
+                <a:latin typeface="微软雅黑" panose="020B0503020204020204" pitchFamily="34" charset="-122"/>
+                <a:ea typeface="微软雅黑" panose="020B0503020204020204" pitchFamily="34" charset="-122"/>
+              </a:endParaRPr>
+            </a:p>
+          </p:txBody>
+        </p:sp>
+        <p:sp>
+          <p:nvSpPr>
+            <p:cNvPr id="38" name="矩形 37">
+              <a:extLst>
+                <a:ext uri="{FF2B5EF4-FFF2-40B4-BE49-F238E27FC236}">
+                  <a16:creationId xmlns:a16="http://schemas.microsoft.com/office/drawing/2014/main" id="{12CE3C91-2648-43CC-A4B0-B9BFCE76BE00}"/>
+                </a:ext>
+              </a:extLst>
+            </p:cNvPr>
+            <p:cNvSpPr/>
+            <p:nvPr/>
+          </p:nvSpPr>
+          <p:spPr>
+            <a:xfrm>
+              <a:off x="7451441" y="5646420"/>
+              <a:ext cx="1021080" cy="536969"/>
+            </a:xfrm>
+            <a:prstGeom prst="rect">
+              <a:avLst/>
+            </a:prstGeom>
+            <a:noFill/>
+            <a:ln w="12700" cap="flat" cmpd="sng" algn="ctr">
+              <a:solidFill>
+                <a:schemeClr val="tx1"/>
+              </a:solidFill>
+              <a:prstDash val="sysDash"/>
+              <a:round/>
+              <a:headEnd type="none" w="med" len="med"/>
+              <a:tailEnd type="none" w="med" len="med"/>
+            </a:ln>
+          </p:spPr>
+          <p:style>
+            <a:lnRef idx="0">
+              <a:scrgbClr r="0" g="0" b="0"/>
+            </a:lnRef>
+            <a:fillRef idx="0">
+              <a:scrgbClr r="0" g="0" b="0"/>
+            </a:fillRef>
+            <a:effectRef idx="0">
+              <a:scrgbClr r="0" g="0" b="0"/>
+            </a:effectRef>
+            <a:fontRef idx="minor">
+              <a:schemeClr val="accent2"/>
+            </a:fontRef>
+          </p:style>
+          <p:txBody>
+            <a:bodyPr rtlCol="0" anchor="ctr"/>
+            <a:lstStyle/>
+            <a:p>
+              <a:pPr algn="ctr"/>
+              <a:endParaRPr lang="zh-CN" altLang="en-US"/>
+            </a:p>
+          </p:txBody>
+        </p:sp>
+        <p:sp>
+          <p:nvSpPr>
+            <p:cNvPr id="40" name="文本框 39">
+              <a:extLst>
+                <a:ext uri="{FF2B5EF4-FFF2-40B4-BE49-F238E27FC236}">
+                  <a16:creationId xmlns:a16="http://schemas.microsoft.com/office/drawing/2014/main" id="{6F05869A-F85A-4C36-A537-9B7FD556F896}"/>
+                </a:ext>
+              </a:extLst>
+            </p:cNvPr>
+            <p:cNvSpPr txBox="1"/>
+            <p:nvPr/>
+          </p:nvSpPr>
+          <p:spPr>
+            <a:xfrm>
+              <a:off x="7385124" y="5374103"/>
+              <a:ext cx="989373" cy="261610"/>
+            </a:xfrm>
+            <a:prstGeom prst="rect">
+              <a:avLst/>
+            </a:prstGeom>
+            <a:noFill/>
+          </p:spPr>
+          <p:txBody>
+            <a:bodyPr wrap="none" rtlCol="0">
+              <a:spAutoFit/>
+            </a:bodyPr>
+            <a:lstStyle/>
+            <a:p>
+              <a:r>
+                <a:rPr lang="en-US" altLang="zh-CN" sz="1100" b="1" dirty="0">
+                  <a:latin typeface="微软雅黑" panose="020B0503020204020204" pitchFamily="34" charset="-122"/>
+                  <a:ea typeface="微软雅黑" panose="020B0503020204020204" pitchFamily="34" charset="-122"/>
+                </a:rPr>
+                <a:t>Signal Area</a:t>
+              </a:r>
+              <a:endParaRPr lang="zh-CN" altLang="en-US" sz="1100" b="1" dirty="0">
+                <a:latin typeface="微软雅黑" panose="020B0503020204020204" pitchFamily="34" charset="-122"/>
+                <a:ea typeface="微软雅黑" panose="020B0503020204020204" pitchFamily="34" charset="-122"/>
+              </a:endParaRPr>
+            </a:p>
+          </p:txBody>
+        </p:sp>
+        <p:cxnSp>
+          <p:nvCxnSpPr>
+            <p:cNvPr id="35" name="直接箭头连接符 34">
+              <a:extLst>
+                <a:ext uri="{FF2B5EF4-FFF2-40B4-BE49-F238E27FC236}">
+                  <a16:creationId xmlns:a16="http://schemas.microsoft.com/office/drawing/2014/main" id="{936D5D68-8B9D-4068-B6B4-B06C98D4A2AD}"/>
+                </a:ext>
+              </a:extLst>
+            </p:cNvPr>
+            <p:cNvCxnSpPr/>
+            <p:nvPr/>
+          </p:nvCxnSpPr>
+          <p:spPr>
+            <a:xfrm>
+              <a:off x="10906983" y="2930962"/>
+              <a:ext cx="335280" cy="281940"/>
+            </a:xfrm>
+            <a:prstGeom prst="straightConnector1">
+              <a:avLst/>
+            </a:prstGeom>
+            <a:ln>
+              <a:tailEnd type="triangle"/>
+            </a:ln>
+          </p:spPr>
+          <p:style>
+            <a:lnRef idx="1">
+              <a:schemeClr val="dk1"/>
+            </a:lnRef>
+            <a:fillRef idx="0">
+              <a:schemeClr val="dk1"/>
+            </a:fillRef>
+            <a:effectRef idx="0">
+              <a:schemeClr val="dk1"/>
+            </a:effectRef>
+            <a:fontRef idx="minor">
+              <a:schemeClr val="tx1"/>
+            </a:fontRef>
+          </p:style>
+        </p:cxnSp>
+        <p:sp>
+          <p:nvSpPr>
+            <p:cNvPr id="36" name="文本框 35">
+              <a:extLst>
+                <a:ext uri="{FF2B5EF4-FFF2-40B4-BE49-F238E27FC236}">
+                  <a16:creationId xmlns:a16="http://schemas.microsoft.com/office/drawing/2014/main" id="{FB73AF26-2052-497C-8A46-987AB5CDF1F3}"/>
+                </a:ext>
+              </a:extLst>
+            </p:cNvPr>
+            <p:cNvSpPr txBox="1"/>
+            <p:nvPr/>
+          </p:nvSpPr>
+          <p:spPr>
+            <a:xfrm>
+              <a:off x="10152603" y="2701023"/>
+              <a:ext cx="1295547" cy="261610"/>
+            </a:xfrm>
+            <a:prstGeom prst="rect">
+              <a:avLst/>
+            </a:prstGeom>
+            <a:noFill/>
+          </p:spPr>
+          <p:txBody>
+            <a:bodyPr wrap="none" rtlCol="0">
+              <a:spAutoFit/>
+            </a:bodyPr>
+            <a:lstStyle/>
+            <a:p>
+              <a:r>
+                <a:rPr lang="en-US" altLang="zh-CN" sz="1100" b="1" dirty="0">
+                  <a:latin typeface="微软雅黑" panose="020B0503020204020204" pitchFamily="34" charset="-122"/>
+                  <a:ea typeface="微软雅黑" panose="020B0503020204020204" pitchFamily="34" charset="-122"/>
+                </a:rPr>
+                <a:t>(-11.77, 0.0261)</a:t>
+              </a:r>
+              <a:endParaRPr lang="zh-CN" altLang="en-US" sz="1100" b="1" dirty="0">
+                <a:latin typeface="微软雅黑" panose="020B0503020204020204" pitchFamily="34" charset="-122"/>
+                <a:ea typeface="微软雅黑" panose="020B0503020204020204" pitchFamily="34" charset="-122"/>
+              </a:endParaRPr>
+            </a:p>
+          </p:txBody>
+        </p:sp>
+        <p:pic>
+          <p:nvPicPr>
+            <p:cNvPr id="4" name="图片 3">
+              <a:extLst>
+                <a:ext uri="{FF2B5EF4-FFF2-40B4-BE49-F238E27FC236}">
+                  <a16:creationId xmlns:a16="http://schemas.microsoft.com/office/drawing/2014/main" id="{CC0A4780-4200-4190-97C6-242904F9E659}"/>
+                </a:ext>
+              </a:extLst>
+            </p:cNvPr>
+            <p:cNvPicPr>
+              <a:picLocks noChangeAspect="1"/>
+            </p:cNvPicPr>
+            <p:nvPr/>
+          </p:nvPicPr>
+          <p:blipFill>
+            <a:blip r:embed="rId6">
+              <a:clrChange>
+                <a:clrFrom>
+                  <a:srgbClr val="FFFFFF"/>
+                </a:clrFrom>
+                <a:clrTo>
+                  <a:srgbClr val="FFFFFF">
+                    <a:alpha val="0"/>
+                  </a:srgbClr>
+                </a:clrTo>
+              </a:clrChange>
+            </a:blip>
+            <a:stretch>
+              <a:fillRect/>
+            </a:stretch>
+          </p:blipFill>
+          <p:spPr>
+            <a:xfrm>
+              <a:off x="8679389" y="3768849"/>
+              <a:ext cx="3106496" cy="2520000"/>
+            </a:xfrm>
+            <a:prstGeom prst="rect">
+              <a:avLst/>
+            </a:prstGeom>
+          </p:spPr>
+        </p:pic>
+        <p:pic>
+          <p:nvPicPr>
+            <p:cNvPr id="10" name="图片 9">
+              <a:extLst>
+                <a:ext uri="{FF2B5EF4-FFF2-40B4-BE49-F238E27FC236}">
+                  <a16:creationId xmlns:a16="http://schemas.microsoft.com/office/drawing/2014/main" id="{5B997EDA-28EB-482F-AF99-6EDF4474AFE3}"/>
+                </a:ext>
+              </a:extLst>
+            </p:cNvPr>
+            <p:cNvPicPr>
+              <a:picLocks noChangeAspect="1"/>
+            </p:cNvPicPr>
+            <p:nvPr/>
+          </p:nvPicPr>
+          <p:blipFill>
+            <a:blip r:embed="rId7">
+              <a:clrChange>
+                <a:clrFrom>
+                  <a:srgbClr val="FFFFFF"/>
+                </a:clrFrom>
+                <a:clrTo>
+                  <a:srgbClr val="FFFFFF">
+                    <a:alpha val="0"/>
+                  </a:srgbClr>
+                </a:clrTo>
+              </a:clrChange>
+            </a:blip>
+            <a:stretch>
+              <a:fillRect/>
+            </a:stretch>
+          </p:blipFill>
+          <p:spPr>
+            <a:xfrm>
+              <a:off x="491485" y="1964734"/>
+              <a:ext cx="4343341" cy="3211691"/>
+            </a:xfrm>
+            <a:prstGeom prst="rect">
+              <a:avLst/>
+            </a:prstGeom>
+          </p:spPr>
+        </p:pic>
+        <p:sp>
+          <p:nvSpPr>
+            <p:cNvPr id="18" name="文本框 17">
+              <a:extLst>
+                <a:ext uri="{FF2B5EF4-FFF2-40B4-BE49-F238E27FC236}">
+                  <a16:creationId xmlns:a16="http://schemas.microsoft.com/office/drawing/2014/main" id="{5ED8C4D4-2CF6-4A2E-8685-E3F11D3D1A54}"/>
+                </a:ext>
+              </a:extLst>
+            </p:cNvPr>
+            <p:cNvSpPr txBox="1"/>
+            <p:nvPr/>
+          </p:nvSpPr>
+          <p:spPr>
+            <a:xfrm>
+              <a:off x="491485" y="1795457"/>
+              <a:ext cx="303288" cy="338554"/>
+            </a:xfrm>
+            <a:prstGeom prst="rect">
+              <a:avLst/>
+            </a:prstGeom>
+            <a:noFill/>
+          </p:spPr>
+          <p:txBody>
+            <a:bodyPr wrap="none" rtlCol="0">
+              <a:spAutoFit/>
+            </a:bodyPr>
+            <a:lstStyle/>
+            <a:p>
+              <a:r>
+                <a:rPr lang="en-US" altLang="zh-CN" sz="1600" b="1" dirty="0">
+                  <a:latin typeface="微软雅黑" panose="020B0503020204020204" pitchFamily="34" charset="-122"/>
+                  <a:ea typeface="微软雅黑" panose="020B0503020204020204" pitchFamily="34" charset="-122"/>
+                </a:rPr>
+                <a:t>a</a:t>
+              </a:r>
+              <a:endParaRPr lang="zh-CN" altLang="en-US" sz="1600" b="1" dirty="0">
+                <a:latin typeface="微软雅黑" panose="020B0503020204020204" pitchFamily="34" charset="-122"/>
+                <a:ea typeface="微软雅黑" panose="020B0503020204020204" pitchFamily="34" charset="-122"/>
+              </a:endParaRPr>
+            </a:p>
+          </p:txBody>
+        </p:sp>
+      </p:grpSp>
     </p:spTree>
     <p:extLst>
       <p:ext uri="{BB962C8B-B14F-4D97-AF65-F5344CB8AC3E}">
@@ -3575,6 +4844,42 @@
           <a:chExt cx="0" cy="0"/>
         </a:xfrm>
       </p:grpSpPr>
+      <p:pic>
+        <p:nvPicPr>
+          <p:cNvPr id="3" name="图片 2">
+            <a:extLst>
+              <a:ext uri="{FF2B5EF4-FFF2-40B4-BE49-F238E27FC236}">
+                <a16:creationId xmlns:a16="http://schemas.microsoft.com/office/drawing/2014/main" id="{FE06A343-AC14-43C2-8534-4D627141B188}"/>
+              </a:ext>
+            </a:extLst>
+          </p:cNvPr>
+          <p:cNvPicPr>
+            <a:picLocks noChangeAspect="1"/>
+          </p:cNvPicPr>
+          <p:nvPr/>
+        </p:nvPicPr>
+        <p:blipFill>
+          <a:blip r:embed="rId2">
+            <a:extLst>
+              <a:ext uri="{28A0092B-C50C-407E-A947-70E740481C1C}">
+                <a14:useLocalDpi xmlns:a14="http://schemas.microsoft.com/office/drawing/2010/main" val="0"/>
+              </a:ext>
+            </a:extLst>
+          </a:blip>
+          <a:stretch>
+            <a:fillRect/>
+          </a:stretch>
+        </p:blipFill>
+        <p:spPr>
+          <a:xfrm>
+            <a:off x="2400299" y="961996"/>
+            <a:ext cx="6959345" cy="3947824"/>
+          </a:xfrm>
+          <a:prstGeom prst="rect">
+            <a:avLst/>
+          </a:prstGeom>
+        </p:spPr>
+      </p:pic>
     </p:spTree>
     <p:extLst>
       <p:ext uri="{BB962C8B-B14F-4D97-AF65-F5344CB8AC3E}">
@@ -3605,6 +4910,36 @@
           <a:chExt cx="0" cy="0"/>
         </a:xfrm>
       </p:grpSpPr>
+      <p:pic>
+        <p:nvPicPr>
+          <p:cNvPr id="5" name="图片 4">
+            <a:extLst>
+              <a:ext uri="{FF2B5EF4-FFF2-40B4-BE49-F238E27FC236}">
+                <a16:creationId xmlns:a16="http://schemas.microsoft.com/office/drawing/2014/main" id="{0FB41039-B027-4A7D-8365-D913AD5DCD0C}"/>
+              </a:ext>
+            </a:extLst>
+          </p:cNvPr>
+          <p:cNvPicPr>
+            <a:picLocks noChangeAspect="1"/>
+          </p:cNvPicPr>
+          <p:nvPr/>
+        </p:nvPicPr>
+        <p:blipFill>
+          <a:blip r:embed="rId2"/>
+          <a:stretch>
+            <a:fillRect/>
+          </a:stretch>
+        </p:blipFill>
+        <p:spPr>
+          <a:xfrm>
+            <a:off x="-365760" y="669476"/>
+            <a:ext cx="12192000" cy="6098167"/>
+          </a:xfrm>
+          <a:prstGeom prst="rect">
+            <a:avLst/>
+          </a:prstGeom>
+        </p:spPr>
+      </p:pic>
     </p:spTree>
     <p:extLst>
       <p:ext uri="{BB962C8B-B14F-4D97-AF65-F5344CB8AC3E}">
@@ -3635,6 +4970,198 @@
           <a:chExt cx="0" cy="0"/>
         </a:xfrm>
       </p:grpSpPr>
+      <p:grpSp>
+        <p:nvGrpSpPr>
+          <p:cNvPr id="14" name="组合 13">
+            <a:extLst>
+              <a:ext uri="{FF2B5EF4-FFF2-40B4-BE49-F238E27FC236}">
+                <a16:creationId xmlns:a16="http://schemas.microsoft.com/office/drawing/2014/main" id="{ADB66DF3-9AC6-4613-9093-454C04140640}"/>
+              </a:ext>
+            </a:extLst>
+          </p:cNvPr>
+          <p:cNvGrpSpPr/>
+          <p:nvPr/>
+        </p:nvGrpSpPr>
+        <p:grpSpPr>
+          <a:xfrm>
+            <a:off x="943322" y="247650"/>
+            <a:ext cx="9158858" cy="7204300"/>
+            <a:chOff x="790922" y="187100"/>
+            <a:chExt cx="9158858" cy="7204300"/>
+          </a:xfrm>
+        </p:grpSpPr>
+        <p:grpSp>
+          <p:nvGrpSpPr>
+            <p:cNvPr id="11" name="组合 10">
+              <a:extLst>
+                <a:ext uri="{FF2B5EF4-FFF2-40B4-BE49-F238E27FC236}">
+                  <a16:creationId xmlns:a16="http://schemas.microsoft.com/office/drawing/2014/main" id="{7ECBBF27-3C4B-451C-9692-C2810D52923D}"/>
+                </a:ext>
+              </a:extLst>
+            </p:cNvPr>
+            <p:cNvGrpSpPr/>
+            <p:nvPr/>
+          </p:nvGrpSpPr>
+          <p:grpSpPr>
+            <a:xfrm>
+              <a:off x="949780" y="187100"/>
+              <a:ext cx="9000000" cy="7204300"/>
+              <a:chOff x="711655" y="-625900"/>
+              <a:chExt cx="9000000" cy="7204300"/>
+            </a:xfrm>
+          </p:grpSpPr>
+          <p:pic>
+            <p:nvPicPr>
+              <p:cNvPr id="8" name="图片 7">
+                <a:extLst>
+                  <a:ext uri="{FF2B5EF4-FFF2-40B4-BE49-F238E27FC236}">
+                    <a16:creationId xmlns:a16="http://schemas.microsoft.com/office/drawing/2014/main" id="{4414BCED-8FE6-4A52-A2E7-CA400E416E40}"/>
+                  </a:ext>
+                </a:extLst>
+              </p:cNvPr>
+              <p:cNvPicPr>
+                <a:picLocks noChangeAspect="1"/>
+              </p:cNvPicPr>
+              <p:nvPr/>
+            </p:nvPicPr>
+            <p:blipFill>
+              <a:blip r:embed="rId2"/>
+              <a:stretch>
+                <a:fillRect/>
+              </a:stretch>
+            </p:blipFill>
+            <p:spPr>
+              <a:xfrm>
+                <a:off x="711655" y="-625900"/>
+                <a:ext cx="9000000" cy="5105426"/>
+              </a:xfrm>
+              <a:prstGeom prst="rect">
+                <a:avLst/>
+              </a:prstGeom>
+            </p:spPr>
+          </p:pic>
+          <p:pic>
+            <p:nvPicPr>
+              <p:cNvPr id="10" name="图片 9">
+                <a:extLst>
+                  <a:ext uri="{FF2B5EF4-FFF2-40B4-BE49-F238E27FC236}">
+                    <a16:creationId xmlns:a16="http://schemas.microsoft.com/office/drawing/2014/main" id="{8D0DBFF5-174F-41CD-8BCF-B94ACF835228}"/>
+                  </a:ext>
+                </a:extLst>
+              </p:cNvPr>
+              <p:cNvPicPr>
+                <a:picLocks noChangeAspect="1"/>
+              </p:cNvPicPr>
+              <p:nvPr/>
+            </p:nvPicPr>
+            <p:blipFill>
+              <a:blip r:embed="rId3">
+                <a:extLst>
+                  <a:ext uri="{28A0092B-C50C-407E-A947-70E740481C1C}">
+                    <a14:useLocalDpi xmlns:a14="http://schemas.microsoft.com/office/drawing/2010/main" val="0"/>
+                  </a:ext>
+                </a:extLst>
+              </a:blip>
+              <a:stretch>
+                <a:fillRect/>
+              </a:stretch>
+            </p:blipFill>
+            <p:spPr>
+              <a:xfrm>
+                <a:off x="711655" y="4580193"/>
+                <a:ext cx="9000000" cy="1998207"/>
+              </a:xfrm>
+              <a:prstGeom prst="rect">
+                <a:avLst/>
+              </a:prstGeom>
+            </p:spPr>
+          </p:pic>
+        </p:grpSp>
+        <p:sp>
+          <p:nvSpPr>
+            <p:cNvPr id="12" name="文本框 11">
+              <a:extLst>
+                <a:ext uri="{FF2B5EF4-FFF2-40B4-BE49-F238E27FC236}">
+                  <a16:creationId xmlns:a16="http://schemas.microsoft.com/office/drawing/2014/main" id="{B1DA3B87-0F65-438A-A67C-40BEE553ED2D}"/>
+                </a:ext>
+              </a:extLst>
+            </p:cNvPr>
+            <p:cNvSpPr txBox="1"/>
+            <p:nvPr/>
+          </p:nvSpPr>
+          <p:spPr>
+            <a:xfrm>
+              <a:off x="790922" y="187100"/>
+              <a:ext cx="317716" cy="369332"/>
+            </a:xfrm>
+            <a:prstGeom prst="rect">
+              <a:avLst/>
+            </a:prstGeom>
+            <a:noFill/>
+          </p:spPr>
+          <p:txBody>
+            <a:bodyPr wrap="none" rtlCol="0">
+              <a:spAutoFit/>
+            </a:bodyPr>
+            <a:lstStyle/>
+            <a:p>
+              <a:r>
+                <a:rPr lang="en-US" altLang="zh-CN" b="1" dirty="0">
+                  <a:latin typeface="微软雅黑" panose="020B0503020204020204" pitchFamily="34" charset="-122"/>
+                  <a:ea typeface="微软雅黑" panose="020B0503020204020204" pitchFamily="34" charset="-122"/>
+                </a:rPr>
+                <a:t>a</a:t>
+              </a:r>
+              <a:endParaRPr lang="zh-CN" altLang="en-US" b="1" dirty="0">
+                <a:latin typeface="微软雅黑" panose="020B0503020204020204" pitchFamily="34" charset="-122"/>
+                <a:ea typeface="微软雅黑" panose="020B0503020204020204" pitchFamily="34" charset="-122"/>
+              </a:endParaRPr>
+            </a:p>
+          </p:txBody>
+        </p:sp>
+        <p:sp>
+          <p:nvSpPr>
+            <p:cNvPr id="13" name="文本框 12">
+              <a:extLst>
+                <a:ext uri="{FF2B5EF4-FFF2-40B4-BE49-F238E27FC236}">
+                  <a16:creationId xmlns:a16="http://schemas.microsoft.com/office/drawing/2014/main" id="{8CD29BA7-6618-4FA3-92BA-E5292703CED6}"/>
+                </a:ext>
+              </a:extLst>
+            </p:cNvPr>
+            <p:cNvSpPr txBox="1"/>
+            <p:nvPr/>
+          </p:nvSpPr>
+          <p:spPr>
+            <a:xfrm>
+              <a:off x="798136" y="5123249"/>
+              <a:ext cx="338554" cy="369332"/>
+            </a:xfrm>
+            <a:prstGeom prst="rect">
+              <a:avLst/>
+            </a:prstGeom>
+            <a:noFill/>
+          </p:spPr>
+          <p:txBody>
+            <a:bodyPr wrap="none" rtlCol="0">
+              <a:spAutoFit/>
+            </a:bodyPr>
+            <a:lstStyle/>
+            <a:p>
+              <a:r>
+                <a:rPr lang="en-US" altLang="zh-CN" b="1" dirty="0">
+                  <a:latin typeface="微软雅黑" panose="020B0503020204020204" pitchFamily="34" charset="-122"/>
+                  <a:ea typeface="微软雅黑" panose="020B0503020204020204" pitchFamily="34" charset="-122"/>
+                </a:rPr>
+                <a:t>b</a:t>
+              </a:r>
+              <a:endParaRPr lang="zh-CN" altLang="en-US" b="1" dirty="0">
+                <a:latin typeface="微软雅黑" panose="020B0503020204020204" pitchFamily="34" charset="-122"/>
+                <a:ea typeface="微软雅黑" panose="020B0503020204020204" pitchFamily="34" charset="-122"/>
+              </a:endParaRPr>
+            </a:p>
+          </p:txBody>
+        </p:sp>
+      </p:grpSp>
     </p:spTree>
     <p:extLst>
       <p:ext uri="{BB962C8B-B14F-4D97-AF65-F5344CB8AC3E}">
@@ -3665,6 +5192,229 @@
           <a:chExt cx="0" cy="0"/>
         </a:xfrm>
       </p:grpSpPr>
+      <p:grpSp>
+        <p:nvGrpSpPr>
+          <p:cNvPr id="21" name="组合 20">
+            <a:extLst>
+              <a:ext uri="{FF2B5EF4-FFF2-40B4-BE49-F238E27FC236}">
+                <a16:creationId xmlns:a16="http://schemas.microsoft.com/office/drawing/2014/main" id="{3FF86EFF-C466-42E6-B5A4-1422F5B355D2}"/>
+              </a:ext>
+            </a:extLst>
+          </p:cNvPr>
+          <p:cNvGrpSpPr/>
+          <p:nvPr/>
+        </p:nvGrpSpPr>
+        <p:grpSpPr>
+          <a:xfrm>
+            <a:off x="2045410" y="1663616"/>
+            <a:ext cx="5772435" cy="4102269"/>
+            <a:chOff x="2045410" y="1663616"/>
+            <a:chExt cx="5772435" cy="4102269"/>
+          </a:xfrm>
+        </p:grpSpPr>
+        <p:pic>
+          <p:nvPicPr>
+            <p:cNvPr id="20" name="图片 19">
+              <a:extLst>
+                <a:ext uri="{FF2B5EF4-FFF2-40B4-BE49-F238E27FC236}">
+                  <a16:creationId xmlns:a16="http://schemas.microsoft.com/office/drawing/2014/main" id="{54643491-462E-48F1-AB77-AE7ABAE0ADFD}"/>
+                </a:ext>
+              </a:extLst>
+            </p:cNvPr>
+            <p:cNvPicPr>
+              <a:picLocks noChangeAspect="1"/>
+            </p:cNvPicPr>
+            <p:nvPr/>
+          </p:nvPicPr>
+          <p:blipFill>
+            <a:blip r:embed="rId2"/>
+            <a:stretch>
+              <a:fillRect/>
+            </a:stretch>
+          </p:blipFill>
+          <p:spPr>
+            <a:xfrm>
+              <a:off x="2045410" y="1663616"/>
+              <a:ext cx="5772435" cy="4102269"/>
+            </a:xfrm>
+            <a:prstGeom prst="rect">
+              <a:avLst/>
+            </a:prstGeom>
+          </p:spPr>
+        </p:pic>
+        <p:cxnSp>
+          <p:nvCxnSpPr>
+            <p:cNvPr id="5" name="直接箭头连接符 4">
+              <a:extLst>
+                <a:ext uri="{FF2B5EF4-FFF2-40B4-BE49-F238E27FC236}">
+                  <a16:creationId xmlns:a16="http://schemas.microsoft.com/office/drawing/2014/main" id="{97376656-4B19-4416-B1AA-BF119E13F5FB}"/>
+                </a:ext>
+              </a:extLst>
+            </p:cNvPr>
+            <p:cNvCxnSpPr>
+              <a:cxnSpLocks/>
+              <a:stCxn id="8" idx="3"/>
+            </p:cNvCxnSpPr>
+            <p:nvPr/>
+          </p:nvCxnSpPr>
+          <p:spPr>
+            <a:xfrm flipV="1">
+              <a:off x="7191517" y="4886607"/>
+              <a:ext cx="409433" cy="153889"/>
+            </a:xfrm>
+            <a:prstGeom prst="straightConnector1">
+              <a:avLst/>
+            </a:prstGeom>
+            <a:ln>
+              <a:tailEnd type="triangle"/>
+            </a:ln>
+          </p:spPr>
+          <p:style>
+            <a:lnRef idx="1">
+              <a:schemeClr val="dk1"/>
+            </a:lnRef>
+            <a:fillRef idx="0">
+              <a:schemeClr val="dk1"/>
+            </a:fillRef>
+            <a:effectRef idx="0">
+              <a:schemeClr val="dk1"/>
+            </a:effectRef>
+            <a:fontRef idx="minor">
+              <a:schemeClr val="tx1"/>
+            </a:fontRef>
+          </p:style>
+        </p:cxnSp>
+        <p:sp>
+          <p:nvSpPr>
+            <p:cNvPr id="8" name="文本框 7">
+              <a:extLst>
+                <a:ext uri="{FF2B5EF4-FFF2-40B4-BE49-F238E27FC236}">
+                  <a16:creationId xmlns:a16="http://schemas.microsoft.com/office/drawing/2014/main" id="{86A68A35-B720-4683-84FB-047437FC53F7}"/>
+                </a:ext>
+              </a:extLst>
+            </p:cNvPr>
+            <p:cNvSpPr txBox="1"/>
+            <p:nvPr/>
+          </p:nvSpPr>
+          <p:spPr>
+            <a:xfrm>
+              <a:off x="5844673" y="4886607"/>
+              <a:ext cx="1346844" cy="307777"/>
+            </a:xfrm>
+            <a:prstGeom prst="rect">
+              <a:avLst/>
+            </a:prstGeom>
+            <a:noFill/>
+          </p:spPr>
+          <p:txBody>
+            <a:bodyPr wrap="none" rtlCol="0">
+              <a:spAutoFit/>
+            </a:bodyPr>
+            <a:lstStyle/>
+            <a:p>
+              <a:r>
+                <a:rPr lang="en-US" altLang="zh-CN" sz="1400" b="1" dirty="0">
+                  <a:latin typeface="Arial" panose="020B0604020202020204" pitchFamily="34" charset="0"/>
+                  <a:ea typeface="微软雅黑" panose="020B0503020204020204" pitchFamily="34" charset="-122"/>
+                  <a:cs typeface="Arial" panose="020B0604020202020204" pitchFamily="34" charset="0"/>
+                </a:rPr>
+                <a:t>(1000, 0.0358)</a:t>
+              </a:r>
+              <a:endParaRPr lang="zh-CN" altLang="en-US" sz="1400" b="1" dirty="0">
+                <a:latin typeface="Arial" panose="020B0604020202020204" pitchFamily="34" charset="0"/>
+                <a:ea typeface="微软雅黑" panose="020B0503020204020204" pitchFamily="34" charset="-122"/>
+                <a:cs typeface="Arial" panose="020B0604020202020204" pitchFamily="34" charset="0"/>
+              </a:endParaRPr>
+            </a:p>
+          </p:txBody>
+        </p:sp>
+        <p:cxnSp>
+          <p:nvCxnSpPr>
+            <p:cNvPr id="13" name="直接箭头连接符 12">
+              <a:extLst>
+                <a:ext uri="{FF2B5EF4-FFF2-40B4-BE49-F238E27FC236}">
+                  <a16:creationId xmlns:a16="http://schemas.microsoft.com/office/drawing/2014/main" id="{044C2239-94DA-4F3C-AEF5-45F8578820A0}"/>
+                </a:ext>
+              </a:extLst>
+            </p:cNvPr>
+            <p:cNvCxnSpPr>
+              <a:cxnSpLocks/>
+              <a:stCxn id="14" idx="2"/>
+            </p:cNvCxnSpPr>
+            <p:nvPr/>
+          </p:nvCxnSpPr>
+          <p:spPr>
+            <a:xfrm flipH="1">
+              <a:off x="3619502" y="4432384"/>
+              <a:ext cx="143800" cy="301541"/>
+            </a:xfrm>
+            <a:prstGeom prst="straightConnector1">
+              <a:avLst/>
+            </a:prstGeom>
+            <a:ln>
+              <a:tailEnd type="triangle"/>
+            </a:ln>
+          </p:spPr>
+          <p:style>
+            <a:lnRef idx="1">
+              <a:schemeClr val="dk1"/>
+            </a:lnRef>
+            <a:fillRef idx="0">
+              <a:schemeClr val="dk1"/>
+            </a:fillRef>
+            <a:effectRef idx="0">
+              <a:schemeClr val="dk1"/>
+            </a:effectRef>
+            <a:fontRef idx="minor">
+              <a:schemeClr val="tx1"/>
+            </a:fontRef>
+          </p:style>
+        </p:cxnSp>
+        <p:sp>
+          <p:nvSpPr>
+            <p:cNvPr id="14" name="文本框 13">
+              <a:extLst>
+                <a:ext uri="{FF2B5EF4-FFF2-40B4-BE49-F238E27FC236}">
+                  <a16:creationId xmlns:a16="http://schemas.microsoft.com/office/drawing/2014/main" id="{9473C48E-2FEB-4520-A69A-91A564AB7FB6}"/>
+                </a:ext>
+              </a:extLst>
+            </p:cNvPr>
+            <p:cNvSpPr txBox="1"/>
+            <p:nvPr/>
+          </p:nvSpPr>
+          <p:spPr>
+            <a:xfrm>
+              <a:off x="3139573" y="4124607"/>
+              <a:ext cx="1247457" cy="307777"/>
+            </a:xfrm>
+            <a:prstGeom prst="rect">
+              <a:avLst/>
+            </a:prstGeom>
+            <a:noFill/>
+          </p:spPr>
+          <p:txBody>
+            <a:bodyPr wrap="none" rtlCol="0">
+              <a:spAutoFit/>
+            </a:bodyPr>
+            <a:lstStyle/>
+            <a:p>
+              <a:r>
+                <a:rPr lang="en-US" altLang="zh-CN" sz="1400" b="1" dirty="0">
+                  <a:latin typeface="Arial" panose="020B0604020202020204" pitchFamily="34" charset="0"/>
+                  <a:ea typeface="微软雅黑" panose="020B0503020204020204" pitchFamily="34" charset="-122"/>
+                  <a:cs typeface="Arial" panose="020B0604020202020204" pitchFamily="34" charset="0"/>
+                </a:rPr>
+                <a:t>(250, 0.0422)</a:t>
+              </a:r>
+              <a:endParaRPr lang="zh-CN" altLang="en-US" sz="1400" b="1" dirty="0">
+                <a:latin typeface="Arial" panose="020B0604020202020204" pitchFamily="34" charset="0"/>
+                <a:ea typeface="微软雅黑" panose="020B0503020204020204" pitchFamily="34" charset="-122"/>
+                <a:cs typeface="Arial" panose="020B0604020202020204" pitchFamily="34" charset="0"/>
+              </a:endParaRPr>
+            </a:p>
+          </p:txBody>
+        </p:sp>
+      </p:grpSp>
     </p:spTree>
     <p:extLst>
       <p:ext uri="{BB962C8B-B14F-4D97-AF65-F5344CB8AC3E}">
@@ -3695,6 +5445,770 @@
           <a:chExt cx="0" cy="0"/>
         </a:xfrm>
       </p:grpSpPr>
+      <p:grpSp>
+        <p:nvGrpSpPr>
+          <p:cNvPr id="36" name="组合 35">
+            <a:extLst>
+              <a:ext uri="{FF2B5EF4-FFF2-40B4-BE49-F238E27FC236}">
+                <a16:creationId xmlns:a16="http://schemas.microsoft.com/office/drawing/2014/main" id="{B23949F8-1289-4947-80D9-3AA007FF0E2C}"/>
+              </a:ext>
+            </a:extLst>
+          </p:cNvPr>
+          <p:cNvGrpSpPr/>
+          <p:nvPr/>
+        </p:nvGrpSpPr>
+        <p:grpSpPr>
+          <a:xfrm>
+            <a:off x="2597443" y="1139269"/>
+            <a:ext cx="6417424" cy="2612630"/>
+            <a:chOff x="2597443" y="1139269"/>
+            <a:chExt cx="6417424" cy="2612630"/>
+          </a:xfrm>
+        </p:grpSpPr>
+        <p:grpSp>
+          <p:nvGrpSpPr>
+            <p:cNvPr id="32" name="组合 31">
+              <a:extLst>
+                <a:ext uri="{FF2B5EF4-FFF2-40B4-BE49-F238E27FC236}">
+                  <a16:creationId xmlns:a16="http://schemas.microsoft.com/office/drawing/2014/main" id="{B7B4ADDA-C9D5-4D98-9A45-317957A3F504}"/>
+                </a:ext>
+              </a:extLst>
+            </p:cNvPr>
+            <p:cNvGrpSpPr/>
+            <p:nvPr/>
+          </p:nvGrpSpPr>
+          <p:grpSpPr>
+            <a:xfrm>
+              <a:off x="2597443" y="1139269"/>
+              <a:ext cx="6417424" cy="2612630"/>
+              <a:chOff x="2597443" y="1139269"/>
+              <a:chExt cx="6417424" cy="2612630"/>
+            </a:xfrm>
+          </p:grpSpPr>
+          <p:grpSp>
+            <p:nvGrpSpPr>
+              <p:cNvPr id="27" name="组合 26">
+                <a:extLst>
+                  <a:ext uri="{FF2B5EF4-FFF2-40B4-BE49-F238E27FC236}">
+                    <a16:creationId xmlns:a16="http://schemas.microsoft.com/office/drawing/2014/main" id="{96186E02-F0C0-4229-824B-FB3808691C42}"/>
+                  </a:ext>
+                </a:extLst>
+              </p:cNvPr>
+              <p:cNvGrpSpPr/>
+              <p:nvPr/>
+            </p:nvGrpSpPr>
+            <p:grpSpPr>
+              <a:xfrm>
+                <a:off x="2597443" y="1139269"/>
+                <a:ext cx="6370984" cy="2612630"/>
+                <a:chOff x="2597443" y="1139269"/>
+                <a:chExt cx="6370984" cy="2612630"/>
+              </a:xfrm>
+            </p:grpSpPr>
+            <p:pic>
+              <p:nvPicPr>
+                <p:cNvPr id="5" name="图片 4">
+                  <a:extLst>
+                    <a:ext uri="{FF2B5EF4-FFF2-40B4-BE49-F238E27FC236}">
+                      <a16:creationId xmlns:a16="http://schemas.microsoft.com/office/drawing/2014/main" id="{19DAC6AB-15F8-40D5-9D6E-06D8B01328A3}"/>
+                    </a:ext>
+                  </a:extLst>
+                </p:cNvPr>
+                <p:cNvPicPr>
+                  <a:picLocks noChangeAspect="1"/>
+                </p:cNvPicPr>
+                <p:nvPr/>
+              </p:nvPicPr>
+              <p:blipFill rotWithShape="1">
+                <a:blip r:embed="rId2"/>
+                <a:srcRect t="30926" r="104"/>
+                <a:stretch/>
+              </p:blipFill>
+              <p:spPr>
+                <a:xfrm>
+                  <a:off x="6236147" y="1227234"/>
+                  <a:ext cx="2732280" cy="2520000"/>
+                </a:xfrm>
+                <a:prstGeom prst="rect">
+                  <a:avLst/>
+                </a:prstGeom>
+              </p:spPr>
+            </p:pic>
+            <p:sp>
+              <p:nvSpPr>
+                <p:cNvPr id="6" name="文本框 5">
+                  <a:extLst>
+                    <a:ext uri="{FF2B5EF4-FFF2-40B4-BE49-F238E27FC236}">
+                      <a16:creationId xmlns:a16="http://schemas.microsoft.com/office/drawing/2014/main" id="{4AB91A94-1EA4-41CF-866A-81F6DA8D46CB}"/>
+                    </a:ext>
+                  </a:extLst>
+                </p:cNvPr>
+                <p:cNvSpPr txBox="1"/>
+                <p:nvPr/>
+              </p:nvSpPr>
+              <p:spPr>
+                <a:xfrm>
+                  <a:off x="7406640" y="2372513"/>
+                  <a:ext cx="1001941" cy="307777"/>
+                </a:xfrm>
+                <a:prstGeom prst="rect">
+                  <a:avLst/>
+                </a:prstGeom>
+                <a:noFill/>
+              </p:spPr>
+              <p:txBody>
+                <a:bodyPr wrap="none" rtlCol="0">
+                  <a:spAutoFit/>
+                </a:bodyPr>
+                <a:lstStyle/>
+                <a:p>
+                  <a:r>
+                    <a:rPr lang="en-US" altLang="zh-CN" sz="1400" dirty="0">
+                      <a:solidFill>
+                        <a:schemeClr val="bg1"/>
+                      </a:solidFill>
+                      <a:latin typeface="Arial" panose="020B0604020202020204" pitchFamily="34" charset="0"/>
+                      <a:cs typeface="Arial" panose="020B0604020202020204" pitchFamily="34" charset="0"/>
+                    </a:rPr>
+                    <a:t>LED Array</a:t>
+                  </a:r>
+                  <a:endParaRPr lang="zh-CN" altLang="en-US" sz="1400" dirty="0">
+                    <a:solidFill>
+                      <a:schemeClr val="bg1"/>
+                    </a:solidFill>
+                    <a:latin typeface="Arial" panose="020B0604020202020204" pitchFamily="34" charset="0"/>
+                    <a:cs typeface="Arial" panose="020B0604020202020204" pitchFamily="34" charset="0"/>
+                  </a:endParaRPr>
+                </a:p>
+              </p:txBody>
+            </p:sp>
+            <p:sp>
+              <p:nvSpPr>
+                <p:cNvPr id="7" name="文本框 6">
+                  <a:extLst>
+                    <a:ext uri="{FF2B5EF4-FFF2-40B4-BE49-F238E27FC236}">
+                      <a16:creationId xmlns:a16="http://schemas.microsoft.com/office/drawing/2014/main" id="{CFF5A19A-D97E-4C22-8AC9-303F6C23D045}"/>
+                    </a:ext>
+                  </a:extLst>
+                </p:cNvPr>
+                <p:cNvSpPr txBox="1"/>
+                <p:nvPr/>
+              </p:nvSpPr>
+              <p:spPr>
+                <a:xfrm>
+                  <a:off x="6407566" y="2662326"/>
+                  <a:ext cx="1090363" cy="307777"/>
+                </a:xfrm>
+                <a:prstGeom prst="rect">
+                  <a:avLst/>
+                </a:prstGeom>
+                <a:noFill/>
+              </p:spPr>
+              <p:txBody>
+                <a:bodyPr wrap="none" rtlCol="0">
+                  <a:spAutoFit/>
+                </a:bodyPr>
+                <a:lstStyle/>
+                <a:p>
+                  <a:r>
+                    <a:rPr lang="en-US" altLang="zh-CN" sz="1400" dirty="0">
+                      <a:solidFill>
+                        <a:schemeClr val="bg1"/>
+                      </a:solidFill>
+                      <a:latin typeface="Arial" panose="020B0604020202020204" pitchFamily="34" charset="0"/>
+                      <a:cs typeface="Arial" panose="020B0604020202020204" pitchFamily="34" charset="0"/>
+                    </a:rPr>
+                    <a:t>Photodiode</a:t>
+                  </a:r>
+                  <a:endParaRPr lang="zh-CN" altLang="en-US" sz="1400" dirty="0">
+                    <a:solidFill>
+                      <a:schemeClr val="bg1"/>
+                    </a:solidFill>
+                    <a:latin typeface="Arial" panose="020B0604020202020204" pitchFamily="34" charset="0"/>
+                    <a:cs typeface="Arial" panose="020B0604020202020204" pitchFamily="34" charset="0"/>
+                  </a:endParaRPr>
+                </a:p>
+              </p:txBody>
+            </p:sp>
+            <p:sp>
+              <p:nvSpPr>
+                <p:cNvPr id="10" name="文本框 9">
+                  <a:extLst>
+                    <a:ext uri="{FF2B5EF4-FFF2-40B4-BE49-F238E27FC236}">
+                      <a16:creationId xmlns:a16="http://schemas.microsoft.com/office/drawing/2014/main" id="{3155E73A-F776-4E1C-BDB8-B4C246CA6931}"/>
+                    </a:ext>
+                  </a:extLst>
+                </p:cNvPr>
+                <p:cNvSpPr txBox="1"/>
+                <p:nvPr/>
+              </p:nvSpPr>
+              <p:spPr>
+                <a:xfrm>
+                  <a:off x="6309932" y="1613346"/>
+                  <a:ext cx="2036135" cy="307777"/>
+                </a:xfrm>
+                <a:prstGeom prst="rect">
+                  <a:avLst/>
+                </a:prstGeom>
+                <a:noFill/>
+              </p:spPr>
+              <p:txBody>
+                <a:bodyPr wrap="none" rtlCol="0">
+                  <a:spAutoFit/>
+                </a:bodyPr>
+                <a:lstStyle/>
+                <a:p>
+                  <a:r>
+                    <a:rPr lang="en-US" altLang="zh-CN" sz="1400" dirty="0">
+                      <a:solidFill>
+                        <a:schemeClr val="bg1"/>
+                      </a:solidFill>
+                      <a:latin typeface="Arial" panose="020B0604020202020204" pitchFamily="34" charset="0"/>
+                      <a:cs typeface="Arial" panose="020B0604020202020204" pitchFamily="34" charset="0"/>
+                    </a:rPr>
+                    <a:t>Reflective </a:t>
+                  </a:r>
+                  <a:r>
+                    <a:rPr lang="en-US" altLang="zh-CN" sz="1400" dirty="0" err="1">
+                      <a:solidFill>
+                        <a:schemeClr val="bg1"/>
+                      </a:solidFill>
+                      <a:latin typeface="Arial" panose="020B0604020202020204" pitchFamily="34" charset="0"/>
+                      <a:cs typeface="Arial" panose="020B0604020202020204" pitchFamily="34" charset="0"/>
+                    </a:rPr>
+                    <a:t>colorchecker</a:t>
+                  </a:r>
+                  <a:endParaRPr lang="zh-CN" altLang="en-US" sz="1400" dirty="0">
+                    <a:solidFill>
+                      <a:schemeClr val="bg1"/>
+                    </a:solidFill>
+                    <a:latin typeface="Arial" panose="020B0604020202020204" pitchFamily="34" charset="0"/>
+                    <a:cs typeface="Arial" panose="020B0604020202020204" pitchFamily="34" charset="0"/>
+                  </a:endParaRPr>
+                </a:p>
+              </p:txBody>
+            </p:sp>
+            <p:sp>
+              <p:nvSpPr>
+                <p:cNvPr id="11" name="文本框 10">
+                  <a:extLst>
+                    <a:ext uri="{FF2B5EF4-FFF2-40B4-BE49-F238E27FC236}">
+                      <a16:creationId xmlns:a16="http://schemas.microsoft.com/office/drawing/2014/main" id="{5E592180-EB34-401D-90DE-85F50D1EFA71}"/>
+                    </a:ext>
+                  </a:extLst>
+                </p:cNvPr>
+                <p:cNvSpPr txBox="1"/>
+                <p:nvPr/>
+              </p:nvSpPr>
+              <p:spPr>
+                <a:xfrm>
+                  <a:off x="4175249" y="1139269"/>
+                  <a:ext cx="1590885" cy="338554"/>
+                </a:xfrm>
+                <a:prstGeom prst="rect">
+                  <a:avLst/>
+                </a:prstGeom>
+                <a:noFill/>
+              </p:spPr>
+              <p:txBody>
+                <a:bodyPr wrap="none" rtlCol="0">
+                  <a:spAutoFit/>
+                </a:bodyPr>
+                <a:lstStyle/>
+                <a:p>
+                  <a:r>
+                    <a:rPr lang="en-US" altLang="zh-CN" sz="1600" dirty="0">
+                      <a:solidFill>
+                        <a:schemeClr val="bg1"/>
+                      </a:solidFill>
+                      <a:latin typeface="Arial" panose="020B0604020202020204" pitchFamily="34" charset="0"/>
+                      <a:cs typeface="Arial" panose="020B0604020202020204" pitchFamily="34" charset="0"/>
+                    </a:rPr>
+                    <a:t>Tr </a:t>
+                  </a:r>
+                  <a:r>
+                    <a:rPr lang="en-US" altLang="zh-CN" sz="1600" dirty="0" err="1">
+                      <a:solidFill>
+                        <a:schemeClr val="bg1"/>
+                      </a:solidFill>
+                      <a:latin typeface="Arial" panose="020B0604020202020204" pitchFamily="34" charset="0"/>
+                      <a:cs typeface="Arial" panose="020B0604020202020204" pitchFamily="34" charset="0"/>
+                    </a:rPr>
+                    <a:t>colorchecker</a:t>
+                  </a:r>
+                  <a:endParaRPr lang="zh-CN" altLang="en-US" sz="1600" dirty="0">
+                    <a:solidFill>
+                      <a:schemeClr val="bg1"/>
+                    </a:solidFill>
+                    <a:latin typeface="Arial" panose="020B0604020202020204" pitchFamily="34" charset="0"/>
+                    <a:cs typeface="Arial" panose="020B0604020202020204" pitchFamily="34" charset="0"/>
+                  </a:endParaRPr>
+                </a:p>
+              </p:txBody>
+            </p:sp>
+            <p:pic>
+              <p:nvPicPr>
+                <p:cNvPr id="13" name="图片 12">
+                  <a:extLst>
+                    <a:ext uri="{FF2B5EF4-FFF2-40B4-BE49-F238E27FC236}">
+                      <a16:creationId xmlns:a16="http://schemas.microsoft.com/office/drawing/2014/main" id="{F2B0C57A-EF47-41A3-BEF3-D872D0BCE13B}"/>
+                    </a:ext>
+                  </a:extLst>
+                </p:cNvPr>
+                <p:cNvPicPr>
+                  <a:picLocks noChangeAspect="1"/>
+                </p:cNvPicPr>
+                <p:nvPr/>
+              </p:nvPicPr>
+              <p:blipFill rotWithShape="1">
+                <a:blip r:embed="rId3"/>
+                <a:srcRect l="11851" r="3681" b="16459"/>
+                <a:stretch/>
+              </p:blipFill>
+              <p:spPr>
+                <a:xfrm>
+                  <a:off x="2597443" y="1231899"/>
+                  <a:ext cx="3398627" cy="2520000"/>
+                </a:xfrm>
+                <a:prstGeom prst="rect">
+                  <a:avLst/>
+                </a:prstGeom>
+              </p:spPr>
+            </p:pic>
+            <p:sp>
+              <p:nvSpPr>
+                <p:cNvPr id="15" name="文本框 14">
+                  <a:extLst>
+                    <a:ext uri="{FF2B5EF4-FFF2-40B4-BE49-F238E27FC236}">
+                      <a16:creationId xmlns:a16="http://schemas.microsoft.com/office/drawing/2014/main" id="{64F628A2-130A-4A91-B4DA-87C8C4602B10}"/>
+                    </a:ext>
+                  </a:extLst>
+                </p:cNvPr>
+                <p:cNvSpPr txBox="1"/>
+                <p:nvPr/>
+              </p:nvSpPr>
+              <p:spPr>
+                <a:xfrm>
+                  <a:off x="3913850" y="2313128"/>
+                  <a:ext cx="1001941" cy="307777"/>
+                </a:xfrm>
+                <a:prstGeom prst="rect">
+                  <a:avLst/>
+                </a:prstGeom>
+                <a:noFill/>
+              </p:spPr>
+              <p:txBody>
+                <a:bodyPr wrap="none" rtlCol="0">
+                  <a:spAutoFit/>
+                </a:bodyPr>
+                <a:lstStyle/>
+                <a:p>
+                  <a:r>
+                    <a:rPr lang="en-US" altLang="zh-CN" sz="1400" dirty="0">
+                      <a:solidFill>
+                        <a:schemeClr val="bg1"/>
+                      </a:solidFill>
+                      <a:latin typeface="Arial" panose="020B0604020202020204" pitchFamily="34" charset="0"/>
+                      <a:cs typeface="Arial" panose="020B0604020202020204" pitchFamily="34" charset="0"/>
+                    </a:rPr>
+                    <a:t>LED Array</a:t>
+                  </a:r>
+                  <a:endParaRPr lang="zh-CN" altLang="en-US" sz="1400" dirty="0">
+                    <a:solidFill>
+                      <a:schemeClr val="bg1"/>
+                    </a:solidFill>
+                    <a:latin typeface="Arial" panose="020B0604020202020204" pitchFamily="34" charset="0"/>
+                    <a:cs typeface="Arial" panose="020B0604020202020204" pitchFamily="34" charset="0"/>
+                  </a:endParaRPr>
+                </a:p>
+              </p:txBody>
+            </p:sp>
+            <p:sp>
+              <p:nvSpPr>
+                <p:cNvPr id="16" name="文本框 15">
+                  <a:extLst>
+                    <a:ext uri="{FF2B5EF4-FFF2-40B4-BE49-F238E27FC236}">
+                      <a16:creationId xmlns:a16="http://schemas.microsoft.com/office/drawing/2014/main" id="{F8007011-88AD-4CB6-A444-9AAF45488455}"/>
+                    </a:ext>
+                  </a:extLst>
+                </p:cNvPr>
+                <p:cNvSpPr txBox="1"/>
+                <p:nvPr/>
+              </p:nvSpPr>
+              <p:spPr>
+                <a:xfrm>
+                  <a:off x="2609498" y="1562629"/>
+                  <a:ext cx="1090363" cy="307777"/>
+                </a:xfrm>
+                <a:prstGeom prst="rect">
+                  <a:avLst/>
+                </a:prstGeom>
+                <a:noFill/>
+              </p:spPr>
+              <p:txBody>
+                <a:bodyPr wrap="none" rtlCol="0">
+                  <a:spAutoFit/>
+                </a:bodyPr>
+                <a:lstStyle/>
+                <a:p>
+                  <a:r>
+                    <a:rPr lang="en-US" altLang="zh-CN" sz="1400" dirty="0">
+                      <a:solidFill>
+                        <a:schemeClr val="bg1"/>
+                      </a:solidFill>
+                      <a:latin typeface="Arial" panose="020B0604020202020204" pitchFamily="34" charset="0"/>
+                      <a:cs typeface="Arial" panose="020B0604020202020204" pitchFamily="34" charset="0"/>
+                    </a:rPr>
+                    <a:t>Photodiode</a:t>
+                  </a:r>
+                  <a:endParaRPr lang="zh-CN" altLang="en-US" sz="1400" dirty="0">
+                    <a:solidFill>
+                      <a:schemeClr val="bg1"/>
+                    </a:solidFill>
+                    <a:latin typeface="Arial" panose="020B0604020202020204" pitchFamily="34" charset="0"/>
+                    <a:cs typeface="Arial" panose="020B0604020202020204" pitchFamily="34" charset="0"/>
+                  </a:endParaRPr>
+                </a:p>
+              </p:txBody>
+            </p:sp>
+            <p:sp>
+              <p:nvSpPr>
+                <p:cNvPr id="19" name="文本框 18">
+                  <a:extLst>
+                    <a:ext uri="{FF2B5EF4-FFF2-40B4-BE49-F238E27FC236}">
+                      <a16:creationId xmlns:a16="http://schemas.microsoft.com/office/drawing/2014/main" id="{C6D7E64A-0C5C-4E27-A870-1A21B25B5360}"/>
+                    </a:ext>
+                  </a:extLst>
+                </p:cNvPr>
+                <p:cNvSpPr txBox="1"/>
+                <p:nvPr/>
+              </p:nvSpPr>
+              <p:spPr>
+                <a:xfrm>
+                  <a:off x="2719659" y="3299305"/>
+                  <a:ext cx="2297167" cy="307777"/>
+                </a:xfrm>
+                <a:prstGeom prst="rect">
+                  <a:avLst/>
+                </a:prstGeom>
+                <a:noFill/>
+              </p:spPr>
+              <p:txBody>
+                <a:bodyPr wrap="none" rtlCol="0">
+                  <a:spAutoFit/>
+                </a:bodyPr>
+                <a:lstStyle/>
+                <a:p>
+                  <a:r>
+                    <a:rPr lang="en-US" altLang="zh-CN" sz="1400" dirty="0">
+                      <a:solidFill>
+                        <a:schemeClr val="bg1"/>
+                      </a:solidFill>
+                      <a:latin typeface="Arial" panose="020B0604020202020204" pitchFamily="34" charset="0"/>
+                      <a:cs typeface="Arial" panose="020B0604020202020204" pitchFamily="34" charset="0"/>
+                    </a:rPr>
+                    <a:t>Transmissive </a:t>
+                  </a:r>
+                  <a:r>
+                    <a:rPr lang="en-US" altLang="zh-CN" sz="1400" dirty="0" err="1">
+                      <a:solidFill>
+                        <a:schemeClr val="bg1"/>
+                      </a:solidFill>
+                      <a:latin typeface="Arial" panose="020B0604020202020204" pitchFamily="34" charset="0"/>
+                      <a:cs typeface="Arial" panose="020B0604020202020204" pitchFamily="34" charset="0"/>
+                    </a:rPr>
+                    <a:t>colorchecker</a:t>
+                  </a:r>
+                  <a:endParaRPr lang="zh-CN" altLang="en-US" sz="1400" dirty="0">
+                    <a:solidFill>
+                      <a:schemeClr val="bg1"/>
+                    </a:solidFill>
+                    <a:latin typeface="Arial" panose="020B0604020202020204" pitchFamily="34" charset="0"/>
+                    <a:cs typeface="Arial" panose="020B0604020202020204" pitchFamily="34" charset="0"/>
+                  </a:endParaRPr>
+                </a:p>
+              </p:txBody>
+            </p:sp>
+            <p:cxnSp>
+              <p:nvCxnSpPr>
+                <p:cNvPr id="21" name="直接箭头连接符 20">
+                  <a:extLst>
+                    <a:ext uri="{FF2B5EF4-FFF2-40B4-BE49-F238E27FC236}">
+                      <a16:creationId xmlns:a16="http://schemas.microsoft.com/office/drawing/2014/main" id="{B22304FC-3F8A-40F9-BD1C-928C55E093DA}"/>
+                    </a:ext>
+                  </a:extLst>
+                </p:cNvPr>
+                <p:cNvCxnSpPr>
+                  <a:cxnSpLocks/>
+                </p:cNvCxnSpPr>
+                <p:nvPr/>
+              </p:nvCxnSpPr>
+              <p:spPr>
+                <a:xfrm flipH="1">
+                  <a:off x="3154680" y="1827260"/>
+                  <a:ext cx="95352" cy="675363"/>
+                </a:xfrm>
+                <a:prstGeom prst="straightConnector1">
+                  <a:avLst/>
+                </a:prstGeom>
+                <a:ln>
+                  <a:solidFill>
+                    <a:schemeClr val="bg1"/>
+                  </a:solidFill>
+                  <a:tailEnd type="triangle"/>
+                </a:ln>
+              </p:spPr>
+              <p:style>
+                <a:lnRef idx="1">
+                  <a:schemeClr val="dk1"/>
+                </a:lnRef>
+                <a:fillRef idx="0">
+                  <a:schemeClr val="dk1"/>
+                </a:fillRef>
+                <a:effectRef idx="0">
+                  <a:schemeClr val="dk1"/>
+                </a:effectRef>
+                <a:fontRef idx="minor">
+                  <a:schemeClr val="tx1"/>
+                </a:fontRef>
+              </p:style>
+            </p:cxnSp>
+            <p:sp>
+              <p:nvSpPr>
+                <p:cNvPr id="24" name="文本框 23">
+                  <a:extLst>
+                    <a:ext uri="{FF2B5EF4-FFF2-40B4-BE49-F238E27FC236}">
+                      <a16:creationId xmlns:a16="http://schemas.microsoft.com/office/drawing/2014/main" id="{3B6621B4-9668-4B0E-BE8F-ACA2848A8316}"/>
+                    </a:ext>
+                  </a:extLst>
+                </p:cNvPr>
+                <p:cNvSpPr txBox="1"/>
+                <p:nvPr/>
+              </p:nvSpPr>
+              <p:spPr>
+                <a:xfrm>
+                  <a:off x="3516685" y="1868312"/>
+                  <a:ext cx="1037463" cy="276999"/>
+                </a:xfrm>
+                <a:prstGeom prst="rect">
+                  <a:avLst/>
+                </a:prstGeom>
+                <a:noFill/>
+              </p:spPr>
+              <p:txBody>
+                <a:bodyPr wrap="none" rtlCol="0">
+                  <a:spAutoFit/>
+                </a:bodyPr>
+                <a:lstStyle/>
+                <a:p>
+                  <a:r>
+                    <a:rPr lang="en-US" altLang="zh-CN" sz="1200" dirty="0">
+                      <a:solidFill>
+                        <a:schemeClr val="bg1"/>
+                      </a:solidFill>
+                      <a:latin typeface="Arial" panose="020B0604020202020204" pitchFamily="34" charset="0"/>
+                      <a:cs typeface="Arial" panose="020B0604020202020204" pitchFamily="34" charset="0"/>
+                    </a:rPr>
+                    <a:t>Driver circuit</a:t>
+                  </a:r>
+                  <a:endParaRPr lang="zh-CN" altLang="en-US" sz="1200" dirty="0">
+                    <a:solidFill>
+                      <a:schemeClr val="bg1"/>
+                    </a:solidFill>
+                    <a:latin typeface="Arial" panose="020B0604020202020204" pitchFamily="34" charset="0"/>
+                    <a:cs typeface="Arial" panose="020B0604020202020204" pitchFamily="34" charset="0"/>
+                  </a:endParaRPr>
+                </a:p>
+              </p:txBody>
+            </p:sp>
+            <p:sp>
+              <p:nvSpPr>
+                <p:cNvPr id="26" name="文本框 25">
+                  <a:extLst>
+                    <a:ext uri="{FF2B5EF4-FFF2-40B4-BE49-F238E27FC236}">
+                      <a16:creationId xmlns:a16="http://schemas.microsoft.com/office/drawing/2014/main" id="{CB34AEB3-BB66-4FCE-89A8-FDD7F1FBF3A2}"/>
+                    </a:ext>
+                  </a:extLst>
+                </p:cNvPr>
+                <p:cNvSpPr txBox="1"/>
+                <p:nvPr/>
+              </p:nvSpPr>
+              <p:spPr>
+                <a:xfrm>
+                  <a:off x="5007891" y="1327862"/>
+                  <a:ext cx="1053494" cy="276999"/>
+                </a:xfrm>
+                <a:prstGeom prst="rect">
+                  <a:avLst/>
+                </a:prstGeom>
+                <a:noFill/>
+              </p:spPr>
+              <p:txBody>
+                <a:bodyPr wrap="none" rtlCol="0">
+                  <a:spAutoFit/>
+                </a:bodyPr>
+                <a:lstStyle/>
+                <a:p>
+                  <a:r>
+                    <a:rPr lang="en-US" altLang="zh-CN" sz="1200" dirty="0">
+                      <a:solidFill>
+                        <a:schemeClr val="bg1"/>
+                      </a:solidFill>
+                      <a:latin typeface="Arial" panose="020B0604020202020204" pitchFamily="34" charset="0"/>
+                      <a:cs typeface="Arial" panose="020B0604020202020204" pitchFamily="34" charset="0"/>
+                    </a:rPr>
+                    <a:t>Oscilloscope</a:t>
+                  </a:r>
+                  <a:endParaRPr lang="zh-CN" altLang="en-US" sz="1200" dirty="0">
+                    <a:solidFill>
+                      <a:schemeClr val="bg1"/>
+                    </a:solidFill>
+                    <a:latin typeface="Arial" panose="020B0604020202020204" pitchFamily="34" charset="0"/>
+                    <a:cs typeface="Arial" panose="020B0604020202020204" pitchFamily="34" charset="0"/>
+                  </a:endParaRPr>
+                </a:p>
+              </p:txBody>
+            </p:sp>
+          </p:grpSp>
+          <p:sp>
+            <p:nvSpPr>
+              <p:cNvPr id="28" name="文本框 27">
+                <a:extLst>
+                  <a:ext uri="{FF2B5EF4-FFF2-40B4-BE49-F238E27FC236}">
+                    <a16:creationId xmlns:a16="http://schemas.microsoft.com/office/drawing/2014/main" id="{34379175-701E-4883-9108-EC4B958148FD}"/>
+                  </a:ext>
+                </a:extLst>
+              </p:cNvPr>
+              <p:cNvSpPr txBox="1"/>
+              <p:nvPr/>
+            </p:nvSpPr>
+            <p:spPr>
+              <a:xfrm>
+                <a:off x="7961373" y="2927902"/>
+                <a:ext cx="1053494" cy="276999"/>
+              </a:xfrm>
+              <a:prstGeom prst="rect">
+                <a:avLst/>
+              </a:prstGeom>
+              <a:noFill/>
+            </p:spPr>
+            <p:txBody>
+              <a:bodyPr wrap="none" rtlCol="0">
+                <a:spAutoFit/>
+              </a:bodyPr>
+              <a:lstStyle/>
+              <a:p>
+                <a:r>
+                  <a:rPr lang="en-US" altLang="zh-CN" sz="1200" dirty="0">
+                    <a:solidFill>
+                      <a:schemeClr val="bg1"/>
+                    </a:solidFill>
+                    <a:latin typeface="Arial" panose="020B0604020202020204" pitchFamily="34" charset="0"/>
+                    <a:cs typeface="Arial" panose="020B0604020202020204" pitchFamily="34" charset="0"/>
+                  </a:rPr>
+                  <a:t>Oscilloscope</a:t>
+                </a:r>
+                <a:endParaRPr lang="zh-CN" altLang="en-US" sz="1200" dirty="0">
+                  <a:solidFill>
+                    <a:schemeClr val="bg1"/>
+                  </a:solidFill>
+                  <a:latin typeface="Arial" panose="020B0604020202020204" pitchFamily="34" charset="0"/>
+                  <a:cs typeface="Arial" panose="020B0604020202020204" pitchFamily="34" charset="0"/>
+                </a:endParaRPr>
+              </a:p>
+            </p:txBody>
+          </p:sp>
+          <p:cxnSp>
+            <p:nvCxnSpPr>
+              <p:cNvPr id="29" name="直接箭头连接符 28">
+                <a:extLst>
+                  <a:ext uri="{FF2B5EF4-FFF2-40B4-BE49-F238E27FC236}">
+                    <a16:creationId xmlns:a16="http://schemas.microsoft.com/office/drawing/2014/main" id="{C0DA3EE9-1FE9-4DFC-9CF4-81769E65AAD0}"/>
+                  </a:ext>
+                </a:extLst>
+              </p:cNvPr>
+              <p:cNvCxnSpPr>
+                <a:cxnSpLocks/>
+              </p:cNvCxnSpPr>
+              <p:nvPr/>
+            </p:nvCxnSpPr>
+            <p:spPr>
+              <a:xfrm flipV="1">
+                <a:off x="8583343" y="2496497"/>
+                <a:ext cx="210137" cy="431405"/>
+              </a:xfrm>
+              <a:prstGeom prst="straightConnector1">
+                <a:avLst/>
+              </a:prstGeom>
+              <a:ln>
+                <a:solidFill>
+                  <a:schemeClr val="bg1"/>
+                </a:solidFill>
+                <a:tailEnd type="triangle"/>
+              </a:ln>
+            </p:spPr>
+            <p:style>
+              <a:lnRef idx="1">
+                <a:schemeClr val="dk1"/>
+              </a:lnRef>
+              <a:fillRef idx="0">
+                <a:schemeClr val="dk1"/>
+              </a:fillRef>
+              <a:effectRef idx="0">
+                <a:schemeClr val="dk1"/>
+              </a:effectRef>
+              <a:fontRef idx="minor">
+                <a:schemeClr val="tx1"/>
+              </a:fontRef>
+            </p:style>
+          </p:cxnSp>
+        </p:grpSp>
+        <p:cxnSp>
+          <p:nvCxnSpPr>
+            <p:cNvPr id="33" name="直接箭头连接符 32">
+              <a:extLst>
+                <a:ext uri="{FF2B5EF4-FFF2-40B4-BE49-F238E27FC236}">
+                  <a16:creationId xmlns:a16="http://schemas.microsoft.com/office/drawing/2014/main" id="{2CA862F1-DC99-4E01-B22F-F999EA573A62}"/>
+                </a:ext>
+              </a:extLst>
+            </p:cNvPr>
+            <p:cNvCxnSpPr>
+              <a:cxnSpLocks/>
+              <a:stCxn id="24" idx="0"/>
+            </p:cNvCxnSpPr>
+            <p:nvPr/>
+          </p:nvCxnSpPr>
+          <p:spPr>
+            <a:xfrm flipV="1">
+              <a:off x="4035417" y="1793159"/>
+              <a:ext cx="758808" cy="75153"/>
+            </a:xfrm>
+            <a:prstGeom prst="straightConnector1">
+              <a:avLst/>
+            </a:prstGeom>
+            <a:ln>
+              <a:solidFill>
+                <a:schemeClr val="bg1"/>
+              </a:solidFill>
+              <a:tailEnd type="triangle"/>
+            </a:ln>
+          </p:spPr>
+          <p:style>
+            <a:lnRef idx="1">
+              <a:schemeClr val="dk1"/>
+            </a:lnRef>
+            <a:fillRef idx="0">
+              <a:schemeClr val="dk1"/>
+            </a:fillRef>
+            <a:effectRef idx="0">
+              <a:schemeClr val="dk1"/>
+            </a:effectRef>
+            <a:fontRef idx="minor">
+              <a:schemeClr val="tx1"/>
+            </a:fontRef>
+          </p:style>
+        </p:cxnSp>
+      </p:grpSp>
     </p:spTree>
     <p:extLst>
       <p:ext uri="{BB962C8B-B14F-4D97-AF65-F5344CB8AC3E}">
@@ -3725,10 +6239,478 @@
           <a:chExt cx="0" cy="0"/>
         </a:xfrm>
       </p:grpSpPr>
+      <p:grpSp>
+        <p:nvGrpSpPr>
+          <p:cNvPr id="14" name="组合 13">
+            <a:extLst>
+              <a:ext uri="{FF2B5EF4-FFF2-40B4-BE49-F238E27FC236}">
+                <a16:creationId xmlns:a16="http://schemas.microsoft.com/office/drawing/2014/main" id="{00ADE31C-1585-48DC-BCB9-4064AA5D06A4}"/>
+              </a:ext>
+            </a:extLst>
+          </p:cNvPr>
+          <p:cNvGrpSpPr/>
+          <p:nvPr/>
+        </p:nvGrpSpPr>
+        <p:grpSpPr>
+          <a:xfrm>
+            <a:off x="5905393" y="2027282"/>
+            <a:ext cx="3521731" cy="2679047"/>
+            <a:chOff x="5905393" y="2027282"/>
+            <a:chExt cx="3521731" cy="2679047"/>
+          </a:xfrm>
+        </p:grpSpPr>
+        <p:pic>
+          <p:nvPicPr>
+            <p:cNvPr id="6" name="图片 5">
+              <a:extLst>
+                <a:ext uri="{FF2B5EF4-FFF2-40B4-BE49-F238E27FC236}">
+                  <a16:creationId xmlns:a16="http://schemas.microsoft.com/office/drawing/2014/main" id="{5CA70656-2E95-45D8-AF32-C09FA64D889F}"/>
+                </a:ext>
+              </a:extLst>
+            </p:cNvPr>
+            <p:cNvPicPr>
+              <a:picLocks noChangeAspect="1"/>
+            </p:cNvPicPr>
+            <p:nvPr/>
+          </p:nvPicPr>
+          <p:blipFill>
+            <a:blip r:embed="rId3">
+              <a:clrChange>
+                <a:clrFrom>
+                  <a:srgbClr val="FFFFFF"/>
+                </a:clrFrom>
+                <a:clrTo>
+                  <a:srgbClr val="FFFFFF">
+                    <a:alpha val="0"/>
+                  </a:srgbClr>
+                </a:clrTo>
+              </a:clrChange>
+            </a:blip>
+            <a:stretch>
+              <a:fillRect/>
+            </a:stretch>
+          </p:blipFill>
+          <p:spPr>
+            <a:xfrm>
+              <a:off x="6304515" y="2186329"/>
+              <a:ext cx="3122609" cy="2520000"/>
+            </a:xfrm>
+            <a:prstGeom prst="rect">
+              <a:avLst/>
+            </a:prstGeom>
+          </p:spPr>
+        </p:pic>
+        <p:grpSp>
+          <p:nvGrpSpPr>
+            <p:cNvPr id="8" name="组合 7">
+              <a:extLst>
+                <a:ext uri="{FF2B5EF4-FFF2-40B4-BE49-F238E27FC236}">
+                  <a16:creationId xmlns:a16="http://schemas.microsoft.com/office/drawing/2014/main" id="{FC10C96F-F6C2-4C0F-B54B-FDD652E155FE}"/>
+                </a:ext>
+              </a:extLst>
+            </p:cNvPr>
+            <p:cNvGrpSpPr/>
+            <p:nvPr/>
+          </p:nvGrpSpPr>
+          <p:grpSpPr>
+            <a:xfrm>
+              <a:off x="5905393" y="2027282"/>
+              <a:ext cx="3167883" cy="2255131"/>
+              <a:chOff x="5905393" y="2027282"/>
+              <a:chExt cx="3167883" cy="2255131"/>
+            </a:xfrm>
+          </p:grpSpPr>
+          <p:sp>
+            <p:nvSpPr>
+              <p:cNvPr id="21" name="文本框 20">
+                <a:extLst>
+                  <a:ext uri="{FF2B5EF4-FFF2-40B4-BE49-F238E27FC236}">
+                    <a16:creationId xmlns:a16="http://schemas.microsoft.com/office/drawing/2014/main" id="{FB6975C1-DB39-46E8-B75D-12B1E881D472}"/>
+                  </a:ext>
+                </a:extLst>
+              </p:cNvPr>
+              <p:cNvSpPr txBox="1"/>
+              <p:nvPr/>
+            </p:nvSpPr>
+            <p:spPr>
+              <a:xfrm>
+                <a:off x="5905393" y="2027282"/>
+                <a:ext cx="320922" cy="338554"/>
+              </a:xfrm>
+              <a:prstGeom prst="rect">
+                <a:avLst/>
+              </a:prstGeom>
+              <a:noFill/>
+            </p:spPr>
+            <p:txBody>
+              <a:bodyPr wrap="none" rtlCol="0">
+                <a:spAutoFit/>
+              </a:bodyPr>
+              <a:lstStyle/>
+              <a:p>
+                <a:r>
+                  <a:rPr lang="en-US" altLang="zh-CN" sz="1600" b="1" dirty="0">
+                    <a:latin typeface="微软雅黑" panose="020B0503020204020204" pitchFamily="34" charset="-122"/>
+                    <a:ea typeface="微软雅黑" panose="020B0503020204020204" pitchFamily="34" charset="-122"/>
+                  </a:rPr>
+                  <a:t>d</a:t>
+                </a:r>
+                <a:endParaRPr lang="zh-CN" altLang="en-US" sz="1600" b="1" dirty="0">
+                  <a:latin typeface="微软雅黑" panose="020B0503020204020204" pitchFamily="34" charset="-122"/>
+                  <a:ea typeface="微软雅黑" panose="020B0503020204020204" pitchFamily="34" charset="-122"/>
+                </a:endParaRPr>
+              </a:p>
+            </p:txBody>
+          </p:sp>
+          <p:cxnSp>
+            <p:nvCxnSpPr>
+              <p:cNvPr id="35" name="直接箭头连接符 34">
+                <a:extLst>
+                  <a:ext uri="{FF2B5EF4-FFF2-40B4-BE49-F238E27FC236}">
+                    <a16:creationId xmlns:a16="http://schemas.microsoft.com/office/drawing/2014/main" id="{936D5D68-8B9D-4068-B6B4-B06C98D4A2AD}"/>
+                  </a:ext>
+                </a:extLst>
+              </p:cNvPr>
+              <p:cNvCxnSpPr/>
+              <p:nvPr/>
+            </p:nvCxnSpPr>
+            <p:spPr>
+              <a:xfrm>
+                <a:off x="8532109" y="4000473"/>
+                <a:ext cx="335280" cy="281940"/>
+              </a:xfrm>
+              <a:prstGeom prst="straightConnector1">
+                <a:avLst/>
+              </a:prstGeom>
+              <a:ln>
+                <a:tailEnd type="triangle"/>
+              </a:ln>
+            </p:spPr>
+            <p:style>
+              <a:lnRef idx="1">
+                <a:schemeClr val="dk1"/>
+              </a:lnRef>
+              <a:fillRef idx="0">
+                <a:schemeClr val="dk1"/>
+              </a:fillRef>
+              <a:effectRef idx="0">
+                <a:schemeClr val="dk1"/>
+              </a:effectRef>
+              <a:fontRef idx="minor">
+                <a:schemeClr val="tx1"/>
+              </a:fontRef>
+            </p:style>
+          </p:cxnSp>
+          <p:sp>
+            <p:nvSpPr>
+              <p:cNvPr id="36" name="文本框 35">
+                <a:extLst>
+                  <a:ext uri="{FF2B5EF4-FFF2-40B4-BE49-F238E27FC236}">
+                    <a16:creationId xmlns:a16="http://schemas.microsoft.com/office/drawing/2014/main" id="{FB73AF26-2052-497C-8A46-987AB5CDF1F3}"/>
+                  </a:ext>
+                </a:extLst>
+              </p:cNvPr>
+              <p:cNvSpPr txBox="1"/>
+              <p:nvPr/>
+            </p:nvSpPr>
+            <p:spPr>
+              <a:xfrm>
+                <a:off x="7777729" y="3770534"/>
+                <a:ext cx="1295547" cy="261610"/>
+              </a:xfrm>
+              <a:prstGeom prst="rect">
+                <a:avLst/>
+              </a:prstGeom>
+              <a:noFill/>
+            </p:spPr>
+            <p:txBody>
+              <a:bodyPr wrap="none" rtlCol="0">
+                <a:spAutoFit/>
+              </a:bodyPr>
+              <a:lstStyle/>
+              <a:p>
+                <a:r>
+                  <a:rPr lang="en-US" altLang="zh-CN" sz="1100" b="1" dirty="0">
+                    <a:latin typeface="微软雅黑" panose="020B0503020204020204" pitchFamily="34" charset="-122"/>
+                    <a:ea typeface="微软雅黑" panose="020B0503020204020204" pitchFamily="34" charset="-122"/>
+                  </a:rPr>
+                  <a:t>(-11.77, 0.0261)</a:t>
+                </a:r>
+                <a:endParaRPr lang="zh-CN" altLang="en-US" sz="1100" b="1" dirty="0">
+                  <a:latin typeface="微软雅黑" panose="020B0503020204020204" pitchFamily="34" charset="-122"/>
+                  <a:ea typeface="微软雅黑" panose="020B0503020204020204" pitchFamily="34" charset="-122"/>
+                </a:endParaRPr>
+              </a:p>
+            </p:txBody>
+          </p:sp>
+        </p:grpSp>
+      </p:grpSp>
+      <p:grpSp>
+        <p:nvGrpSpPr>
+          <p:cNvPr id="13" name="组合 12">
+            <a:extLst>
+              <a:ext uri="{FF2B5EF4-FFF2-40B4-BE49-F238E27FC236}">
+                <a16:creationId xmlns:a16="http://schemas.microsoft.com/office/drawing/2014/main" id="{AE3EA8D5-B607-4ED1-9701-F3D4975C3F84}"/>
+              </a:ext>
+            </a:extLst>
+          </p:cNvPr>
+          <p:cNvGrpSpPr/>
+          <p:nvPr/>
+        </p:nvGrpSpPr>
+        <p:grpSpPr>
+          <a:xfrm>
+            <a:off x="5999623" y="4640091"/>
+            <a:ext cx="3411388" cy="2718269"/>
+            <a:chOff x="5999623" y="4640091"/>
+            <a:chExt cx="3411388" cy="2718269"/>
+          </a:xfrm>
+        </p:grpSpPr>
+        <p:sp>
+          <p:nvSpPr>
+            <p:cNvPr id="38" name="矩形 37">
+              <a:extLst>
+                <a:ext uri="{FF2B5EF4-FFF2-40B4-BE49-F238E27FC236}">
+                  <a16:creationId xmlns:a16="http://schemas.microsoft.com/office/drawing/2014/main" id="{12CE3C91-2648-43CC-A4B0-B9BFCE76BE00}"/>
+                </a:ext>
+              </a:extLst>
+            </p:cNvPr>
+            <p:cNvSpPr/>
+            <p:nvPr/>
+          </p:nvSpPr>
+          <p:spPr>
+            <a:xfrm>
+              <a:off x="7451441" y="5646420"/>
+              <a:ext cx="1021080" cy="536969"/>
+            </a:xfrm>
+            <a:prstGeom prst="rect">
+              <a:avLst/>
+            </a:prstGeom>
+            <a:noFill/>
+            <a:ln w="12700" cap="flat" cmpd="sng" algn="ctr">
+              <a:solidFill>
+                <a:schemeClr val="tx1"/>
+              </a:solidFill>
+              <a:prstDash val="sysDash"/>
+              <a:round/>
+              <a:headEnd type="none" w="med" len="med"/>
+              <a:tailEnd type="none" w="med" len="med"/>
+            </a:ln>
+          </p:spPr>
+          <p:style>
+            <a:lnRef idx="0">
+              <a:scrgbClr r="0" g="0" b="0"/>
+            </a:lnRef>
+            <a:fillRef idx="0">
+              <a:scrgbClr r="0" g="0" b="0"/>
+            </a:fillRef>
+            <a:effectRef idx="0">
+              <a:scrgbClr r="0" g="0" b="0"/>
+            </a:effectRef>
+            <a:fontRef idx="minor">
+              <a:schemeClr val="accent2"/>
+            </a:fontRef>
+          </p:style>
+          <p:txBody>
+            <a:bodyPr rtlCol="0" anchor="ctr"/>
+            <a:lstStyle/>
+            <a:p>
+              <a:pPr algn="ctr"/>
+              <a:endParaRPr lang="zh-CN" altLang="en-US"/>
+            </a:p>
+          </p:txBody>
+        </p:sp>
+        <p:sp>
+          <p:nvSpPr>
+            <p:cNvPr id="22" name="文本框 21">
+              <a:extLst>
+                <a:ext uri="{FF2B5EF4-FFF2-40B4-BE49-F238E27FC236}">
+                  <a16:creationId xmlns:a16="http://schemas.microsoft.com/office/drawing/2014/main" id="{ECC91E1C-751A-448F-A008-0B65077A0DF8}"/>
+                </a:ext>
+              </a:extLst>
+            </p:cNvPr>
+            <p:cNvSpPr txBox="1"/>
+            <p:nvPr/>
+          </p:nvSpPr>
+          <p:spPr>
+            <a:xfrm>
+              <a:off x="5999623" y="4640091"/>
+              <a:ext cx="304892" cy="338554"/>
+            </a:xfrm>
+            <a:prstGeom prst="rect">
+              <a:avLst/>
+            </a:prstGeom>
+            <a:noFill/>
+          </p:spPr>
+          <p:txBody>
+            <a:bodyPr wrap="none" rtlCol="0">
+              <a:spAutoFit/>
+            </a:bodyPr>
+            <a:lstStyle/>
+            <a:p>
+              <a:r>
+                <a:rPr lang="en-US" altLang="zh-CN" sz="1600" b="1" dirty="0">
+                  <a:latin typeface="微软雅黑" panose="020B0503020204020204" pitchFamily="34" charset="-122"/>
+                  <a:ea typeface="微软雅黑" panose="020B0503020204020204" pitchFamily="34" charset="-122"/>
+                </a:rPr>
+                <a:t>e</a:t>
+              </a:r>
+              <a:endParaRPr lang="zh-CN" altLang="en-US" sz="1600" b="1" dirty="0">
+                <a:latin typeface="微软雅黑" panose="020B0503020204020204" pitchFamily="34" charset="-122"/>
+                <a:ea typeface="微软雅黑" panose="020B0503020204020204" pitchFamily="34" charset="-122"/>
+              </a:endParaRPr>
+            </a:p>
+          </p:txBody>
+        </p:sp>
+        <p:pic>
+          <p:nvPicPr>
+            <p:cNvPr id="4" name="图片 3">
+              <a:extLst>
+                <a:ext uri="{FF2B5EF4-FFF2-40B4-BE49-F238E27FC236}">
+                  <a16:creationId xmlns:a16="http://schemas.microsoft.com/office/drawing/2014/main" id="{CC0A4780-4200-4190-97C6-242904F9E659}"/>
+                </a:ext>
+              </a:extLst>
+            </p:cNvPr>
+            <p:cNvPicPr>
+              <a:picLocks noChangeAspect="1"/>
+            </p:cNvPicPr>
+            <p:nvPr/>
+          </p:nvPicPr>
+          <p:blipFill>
+            <a:blip r:embed="rId4">
+              <a:clrChange>
+                <a:clrFrom>
+                  <a:srgbClr val="FFFFFF"/>
+                </a:clrFrom>
+                <a:clrTo>
+                  <a:srgbClr val="FFFFFF">
+                    <a:alpha val="0"/>
+                  </a:srgbClr>
+                </a:clrTo>
+              </a:clrChange>
+            </a:blip>
+            <a:stretch>
+              <a:fillRect/>
+            </a:stretch>
+          </p:blipFill>
+          <p:spPr>
+            <a:xfrm>
+              <a:off x="6304515" y="4838360"/>
+              <a:ext cx="3106496" cy="2520000"/>
+            </a:xfrm>
+            <a:prstGeom prst="rect">
+              <a:avLst/>
+            </a:prstGeom>
+          </p:spPr>
+        </p:pic>
+      </p:grpSp>
+      <p:grpSp>
+        <p:nvGrpSpPr>
+          <p:cNvPr id="3" name="组合 2">
+            <a:extLst>
+              <a:ext uri="{FF2B5EF4-FFF2-40B4-BE49-F238E27FC236}">
+                <a16:creationId xmlns:a16="http://schemas.microsoft.com/office/drawing/2014/main" id="{086DBF06-3F6A-44F3-B246-C8D2E88481BC}"/>
+              </a:ext>
+            </a:extLst>
+          </p:cNvPr>
+          <p:cNvGrpSpPr/>
+          <p:nvPr/>
+        </p:nvGrpSpPr>
+        <p:grpSpPr>
+          <a:xfrm>
+            <a:off x="3108100" y="-1233988"/>
+            <a:ext cx="4343341" cy="3380968"/>
+            <a:chOff x="491485" y="1795457"/>
+            <a:chExt cx="4343341" cy="3380968"/>
+          </a:xfrm>
+        </p:grpSpPr>
+        <p:pic>
+          <p:nvPicPr>
+            <p:cNvPr id="10" name="图片 9">
+              <a:extLst>
+                <a:ext uri="{FF2B5EF4-FFF2-40B4-BE49-F238E27FC236}">
+                  <a16:creationId xmlns:a16="http://schemas.microsoft.com/office/drawing/2014/main" id="{5B997EDA-28EB-482F-AF99-6EDF4474AFE3}"/>
+                </a:ext>
+              </a:extLst>
+            </p:cNvPr>
+            <p:cNvPicPr>
+              <a:picLocks noChangeAspect="1"/>
+            </p:cNvPicPr>
+            <p:nvPr/>
+          </p:nvPicPr>
+          <p:blipFill>
+            <a:blip r:embed="rId5">
+              <a:clrChange>
+                <a:clrFrom>
+                  <a:srgbClr val="FFFFFF"/>
+                </a:clrFrom>
+                <a:clrTo>
+                  <a:srgbClr val="FFFFFF">
+                    <a:alpha val="0"/>
+                  </a:srgbClr>
+                </a:clrTo>
+              </a:clrChange>
+            </a:blip>
+            <a:stretch>
+              <a:fillRect/>
+            </a:stretch>
+          </p:blipFill>
+          <p:spPr>
+            <a:xfrm>
+              <a:off x="491485" y="1964734"/>
+              <a:ext cx="4343341" cy="3211691"/>
+            </a:xfrm>
+            <a:prstGeom prst="rect">
+              <a:avLst/>
+            </a:prstGeom>
+          </p:spPr>
+        </p:pic>
+        <p:sp>
+          <p:nvSpPr>
+            <p:cNvPr id="18" name="文本框 17">
+              <a:extLst>
+                <a:ext uri="{FF2B5EF4-FFF2-40B4-BE49-F238E27FC236}">
+                  <a16:creationId xmlns:a16="http://schemas.microsoft.com/office/drawing/2014/main" id="{5ED8C4D4-2CF6-4A2E-8685-E3F11D3D1A54}"/>
+                </a:ext>
+              </a:extLst>
+            </p:cNvPr>
+            <p:cNvSpPr txBox="1"/>
+            <p:nvPr/>
+          </p:nvSpPr>
+          <p:spPr>
+            <a:xfrm>
+              <a:off x="491485" y="1795457"/>
+              <a:ext cx="303288" cy="338554"/>
+            </a:xfrm>
+            <a:prstGeom prst="rect">
+              <a:avLst/>
+            </a:prstGeom>
+            <a:noFill/>
+          </p:spPr>
+          <p:txBody>
+            <a:bodyPr wrap="none" rtlCol="0">
+              <a:spAutoFit/>
+            </a:bodyPr>
+            <a:lstStyle/>
+            <a:p>
+              <a:r>
+                <a:rPr lang="en-US" altLang="zh-CN" sz="1600" b="1" dirty="0">
+                  <a:latin typeface="微软雅黑" panose="020B0503020204020204" pitchFamily="34" charset="-122"/>
+                  <a:ea typeface="微软雅黑" panose="020B0503020204020204" pitchFamily="34" charset="-122"/>
+                </a:rPr>
+                <a:t>a</a:t>
+              </a:r>
+              <a:endParaRPr lang="zh-CN" altLang="en-US" sz="1600" b="1" dirty="0">
+                <a:latin typeface="微软雅黑" panose="020B0503020204020204" pitchFamily="34" charset="-122"/>
+                <a:ea typeface="微软雅黑" panose="020B0503020204020204" pitchFamily="34" charset="-122"/>
+              </a:endParaRPr>
+            </a:p>
+          </p:txBody>
+        </p:sp>
+      </p:grpSp>
     </p:spTree>
     <p:extLst>
       <p:ext uri="{BB962C8B-B14F-4D97-AF65-F5344CB8AC3E}">
-        <p14:creationId xmlns:p14="http://schemas.microsoft.com/office/powerpoint/2010/main" val="611043060"/>
+        <p14:creationId xmlns:p14="http://schemas.microsoft.com/office/powerpoint/2010/main" val="640990223"/>
       </p:ext>
     </p:extLst>
   </p:cSld>
@@ -3758,7 +6740,7 @@
     </p:spTree>
     <p:extLst>
       <p:ext uri="{BB962C8B-B14F-4D97-AF65-F5344CB8AC3E}">
-        <p14:creationId xmlns:p14="http://schemas.microsoft.com/office/powerpoint/2010/main" val="1524911457"/>
+        <p14:creationId xmlns:p14="http://schemas.microsoft.com/office/powerpoint/2010/main" val="611043060"/>
       </p:ext>
     </p:extLst>
   </p:cSld>
@@ -4061,4 +7043,299 @@
     </a:ext>
   </a:extLst>
 </a:theme>
+</file>
+
+<file path=ppt/theme/theme2.xml><?xml version="1.0" encoding="utf-8"?>
+<a:theme xmlns:a="http://schemas.openxmlformats.org/drawingml/2006/main" name="Office 主题​​">
+  <a:themeElements>
+    <a:clrScheme name="Office">
+      <a:dk1>
+        <a:sysClr val="windowText" lastClr="000000"/>
+      </a:dk1>
+      <a:lt1>
+        <a:sysClr val="window" lastClr="FFFFFF"/>
+      </a:lt1>
+      <a:dk2>
+        <a:srgbClr val="44546A"/>
+      </a:dk2>
+      <a:lt2>
+        <a:srgbClr val="E7E6E6"/>
+      </a:lt2>
+      <a:accent1>
+        <a:srgbClr val="4472C4"/>
+      </a:accent1>
+      <a:accent2>
+        <a:srgbClr val="ED7D31"/>
+      </a:accent2>
+      <a:accent3>
+        <a:srgbClr val="A5A5A5"/>
+      </a:accent3>
+      <a:accent4>
+        <a:srgbClr val="FFC000"/>
+      </a:accent4>
+      <a:accent5>
+        <a:srgbClr val="5B9BD5"/>
+      </a:accent5>
+      <a:accent6>
+        <a:srgbClr val="70AD47"/>
+      </a:accent6>
+      <a:hlink>
+        <a:srgbClr val="0563C1"/>
+      </a:hlink>
+      <a:folHlink>
+        <a:srgbClr val="954F72"/>
+      </a:folHlink>
+    </a:clrScheme>
+    <a:fontScheme name="Office">
+      <a:majorFont>
+        <a:latin typeface="等线 Light" panose="020F0302020204030204"/>
+        <a:ea typeface=""/>
+        <a:cs typeface=""/>
+        <a:font script="Jpan" typeface="游ゴシック Light"/>
+        <a:font script="Hang" typeface="맑은 고딕"/>
+        <a:font script="Hans" typeface="等线 Light"/>
+        <a:font script="Hant" typeface="新細明體"/>
+        <a:font script="Arab" typeface="Times New Roman"/>
+        <a:font script="Hebr" typeface="Times New Roman"/>
+        <a:font script="Thai" typeface="Angsana New"/>
+        <a:font script="Ethi" typeface="Nyala"/>
+        <a:font script="Beng" typeface="Vrinda"/>
+        <a:font script="Gujr" typeface="Shruti"/>
+        <a:font script="Khmr" typeface="MoolBoran"/>
+        <a:font script="Knda" typeface="Tunga"/>
+        <a:font script="Guru" typeface="Raavi"/>
+        <a:font script="Cans" typeface="Euphemia"/>
+        <a:font script="Cher" typeface="Plantagenet Cherokee"/>
+        <a:font script="Yiii" typeface="Microsoft Yi Baiti"/>
+        <a:font script="Tibt" typeface="Microsoft Himalaya"/>
+        <a:font script="Thaa" typeface="MV Boli"/>
+        <a:font script="Deva" typeface="Mangal"/>
+        <a:font script="Telu" typeface="Gautami"/>
+        <a:font script="Taml" typeface="Latha"/>
+        <a:font script="Syrc" typeface="Estrangelo Edessa"/>
+        <a:font script="Orya" typeface="Kalinga"/>
+        <a:font script="Mlym" typeface="Kartika"/>
+        <a:font script="Laoo" typeface="DokChampa"/>
+        <a:font script="Sinh" typeface="Iskoola Pota"/>
+        <a:font script="Mong" typeface="Mongolian Baiti"/>
+        <a:font script="Viet" typeface="Times New Roman"/>
+        <a:font script="Uigh" typeface="Microsoft Uighur"/>
+        <a:font script="Geor" typeface="Sylfaen"/>
+        <a:font script="Armn" typeface="Arial"/>
+        <a:font script="Bugi" typeface="Leelawadee UI"/>
+        <a:font script="Bopo" typeface="Microsoft JhengHei"/>
+        <a:font script="Java" typeface="Javanese Text"/>
+        <a:font script="Lisu" typeface="Segoe UI"/>
+        <a:font script="Mymr" typeface="Myanmar Text"/>
+        <a:font script="Nkoo" typeface="Ebrima"/>
+        <a:font script="Olck" typeface="Nirmala UI"/>
+        <a:font script="Osma" typeface="Ebrima"/>
+        <a:font script="Phag" typeface="Phagspa"/>
+        <a:font script="Syrn" typeface="Estrangelo Edessa"/>
+        <a:font script="Syrj" typeface="Estrangelo Edessa"/>
+        <a:font script="Syre" typeface="Estrangelo Edessa"/>
+        <a:font script="Sora" typeface="Nirmala UI"/>
+        <a:font script="Tale" typeface="Microsoft Tai Le"/>
+        <a:font script="Talu" typeface="Microsoft New Tai Lue"/>
+        <a:font script="Tfng" typeface="Ebrima"/>
+      </a:majorFont>
+      <a:minorFont>
+        <a:latin typeface="等线" panose="020F0502020204030204"/>
+        <a:ea typeface=""/>
+        <a:cs typeface=""/>
+        <a:font script="Jpan" typeface="游ゴシック"/>
+        <a:font script="Hang" typeface="맑은 고딕"/>
+        <a:font script="Hans" typeface="等线"/>
+        <a:font script="Hant" typeface="新細明體"/>
+        <a:font script="Arab" typeface="Arial"/>
+        <a:font script="Hebr" typeface="Arial"/>
+        <a:font script="Thai" typeface="Cordia New"/>
+        <a:font script="Ethi" typeface="Nyala"/>
+        <a:font script="Beng" typeface="Vrinda"/>
+        <a:font script="Gujr" typeface="Shruti"/>
+        <a:font script="Khmr" typeface="DaunPenh"/>
+        <a:font script="Knda" typeface="Tunga"/>
+        <a:font script="Guru" typeface="Raavi"/>
+        <a:font script="Cans" typeface="Euphemia"/>
+        <a:font script="Cher" typeface="Plantagenet Cherokee"/>
+        <a:font script="Yiii" typeface="Microsoft Yi Baiti"/>
+        <a:font script="Tibt" typeface="Microsoft Himalaya"/>
+        <a:font script="Thaa" typeface="MV Boli"/>
+        <a:font script="Deva" typeface="Mangal"/>
+        <a:font script="Telu" typeface="Gautami"/>
+        <a:font script="Taml" typeface="Latha"/>
+        <a:font script="Syrc" typeface="Estrangelo Edessa"/>
+        <a:font script="Orya" typeface="Kalinga"/>
+        <a:font script="Mlym" typeface="Kartika"/>
+        <a:font script="Laoo" typeface="DokChampa"/>
+        <a:font script="Sinh" typeface="Iskoola Pota"/>
+        <a:font script="Mong" typeface="Mongolian Baiti"/>
+        <a:font script="Viet" typeface="Arial"/>
+        <a:font script="Uigh" typeface="Microsoft Uighur"/>
+        <a:font script="Geor" typeface="Sylfaen"/>
+        <a:font script="Armn" typeface="Arial"/>
+        <a:font script="Bugi" typeface="Leelawadee UI"/>
+        <a:font script="Bopo" typeface="Microsoft JhengHei"/>
+        <a:font script="Java" typeface="Javanese Text"/>
+        <a:font script="Lisu" typeface="Segoe UI"/>
+        <a:font script="Mymr" typeface="Myanmar Text"/>
+        <a:font script="Nkoo" typeface="Ebrima"/>
+        <a:font script="Olck" typeface="Nirmala UI"/>
+        <a:font script="Osma" typeface="Ebrima"/>
+        <a:font script="Phag" typeface="Phagspa"/>
+        <a:font script="Syrn" typeface="Estrangelo Edessa"/>
+        <a:font script="Syrj" typeface="Estrangelo Edessa"/>
+        <a:font script="Syre" typeface="Estrangelo Edessa"/>
+        <a:font script="Sora" typeface="Nirmala UI"/>
+        <a:font script="Tale" typeface="Microsoft Tai Le"/>
+        <a:font script="Talu" typeface="Microsoft New Tai Lue"/>
+        <a:font script="Tfng" typeface="Ebrima"/>
+      </a:minorFont>
+    </a:fontScheme>
+    <a:fmtScheme name="Office">
+      <a:fillStyleLst>
+        <a:solidFill>
+          <a:schemeClr val="phClr"/>
+        </a:solidFill>
+        <a:gradFill rotWithShape="1">
+          <a:gsLst>
+            <a:gs pos="0">
+              <a:schemeClr val="phClr">
+                <a:lumMod val="110000"/>
+                <a:satMod val="105000"/>
+                <a:tint val="67000"/>
+              </a:schemeClr>
+            </a:gs>
+            <a:gs pos="50000">
+              <a:schemeClr val="phClr">
+                <a:lumMod val="105000"/>
+                <a:satMod val="103000"/>
+                <a:tint val="73000"/>
+              </a:schemeClr>
+            </a:gs>
+            <a:gs pos="100000">
+              <a:schemeClr val="phClr">
+                <a:lumMod val="105000"/>
+                <a:satMod val="109000"/>
+                <a:tint val="81000"/>
+              </a:schemeClr>
+            </a:gs>
+          </a:gsLst>
+          <a:lin ang="5400000" scaled="0"/>
+        </a:gradFill>
+        <a:gradFill rotWithShape="1">
+          <a:gsLst>
+            <a:gs pos="0">
+              <a:schemeClr val="phClr">
+                <a:satMod val="103000"/>
+                <a:lumMod val="102000"/>
+                <a:tint val="94000"/>
+              </a:schemeClr>
+            </a:gs>
+            <a:gs pos="50000">
+              <a:schemeClr val="phClr">
+                <a:satMod val="110000"/>
+                <a:lumMod val="100000"/>
+                <a:shade val="100000"/>
+              </a:schemeClr>
+            </a:gs>
+            <a:gs pos="100000">
+              <a:schemeClr val="phClr">
+                <a:lumMod val="99000"/>
+                <a:satMod val="120000"/>
+                <a:shade val="78000"/>
+              </a:schemeClr>
+            </a:gs>
+          </a:gsLst>
+          <a:lin ang="5400000" scaled="0"/>
+        </a:gradFill>
+      </a:fillStyleLst>
+      <a:lnStyleLst>
+        <a:ln w="6350" cap="flat" cmpd="sng" algn="ctr">
+          <a:solidFill>
+            <a:schemeClr val="phClr"/>
+          </a:solidFill>
+          <a:prstDash val="solid"/>
+          <a:miter lim="800000"/>
+        </a:ln>
+        <a:ln w="12700" cap="flat" cmpd="sng" algn="ctr">
+          <a:solidFill>
+            <a:schemeClr val="phClr"/>
+          </a:solidFill>
+          <a:prstDash val="solid"/>
+          <a:miter lim="800000"/>
+        </a:ln>
+        <a:ln w="19050" cap="flat" cmpd="sng" algn="ctr">
+          <a:solidFill>
+            <a:schemeClr val="phClr"/>
+          </a:solidFill>
+          <a:prstDash val="solid"/>
+          <a:miter lim="800000"/>
+        </a:ln>
+      </a:lnStyleLst>
+      <a:effectStyleLst>
+        <a:effectStyle>
+          <a:effectLst/>
+        </a:effectStyle>
+        <a:effectStyle>
+          <a:effectLst/>
+        </a:effectStyle>
+        <a:effectStyle>
+          <a:effectLst>
+            <a:outerShdw blurRad="57150" dist="19050" dir="5400000" algn="ctr" rotWithShape="0">
+              <a:srgbClr val="000000">
+                <a:alpha val="63000"/>
+              </a:srgbClr>
+            </a:outerShdw>
+          </a:effectLst>
+        </a:effectStyle>
+      </a:effectStyleLst>
+      <a:bgFillStyleLst>
+        <a:solidFill>
+          <a:schemeClr val="phClr"/>
+        </a:solidFill>
+        <a:solidFill>
+          <a:schemeClr val="phClr">
+            <a:tint val="95000"/>
+            <a:satMod val="170000"/>
+          </a:schemeClr>
+        </a:solidFill>
+        <a:gradFill rotWithShape="1">
+          <a:gsLst>
+            <a:gs pos="0">
+              <a:schemeClr val="phClr">
+                <a:tint val="93000"/>
+                <a:satMod val="150000"/>
+                <a:shade val="98000"/>
+                <a:lumMod val="102000"/>
+              </a:schemeClr>
+            </a:gs>
+            <a:gs pos="50000">
+              <a:schemeClr val="phClr">
+                <a:tint val="98000"/>
+                <a:satMod val="130000"/>
+                <a:shade val="90000"/>
+                <a:lumMod val="103000"/>
+              </a:schemeClr>
+            </a:gs>
+            <a:gs pos="100000">
+              <a:schemeClr val="phClr">
+                <a:shade val="63000"/>
+                <a:satMod val="120000"/>
+              </a:schemeClr>
+            </a:gs>
+          </a:gsLst>
+          <a:lin ang="5400000" scaled="0"/>
+        </a:gradFill>
+      </a:bgFillStyleLst>
+    </a:fmtScheme>
+  </a:themeElements>
+  <a:objectDefaults/>
+  <a:extraClrSchemeLst/>
+  <a:extLst>
+    <a:ext uri="{05A4C25C-085E-4340-85A3-A5531E510DB2}">
+      <thm15:themeFamily xmlns:thm15="http://schemas.microsoft.com/office/thememl/2012/main" name="Office Theme" id="{62F939B6-93AF-4DB8-9C6B-D6C7DFDC589F}" vid="{4A3C46E8-61CC-4603-A589-7422A47A8E4A}"/>
+    </a:ext>
+  </a:extLst>
+</a:theme>
 </file>
--- a/Paper-OTFE/PPT-Paper-OTFE.pptx
+++ b/Paper-OTFE/PPT-Paper-OTFE.pptx
@@ -212,7 +212,7 @@
           <a:p>
             <a:fld id="{FCADBD25-75A8-4A51-9AF0-300401955B5E}" type="datetimeFigureOut">
               <a:rPr lang="zh-CN" altLang="en-US" smtClean="0"/>
-              <a:t>2026/1/24</a:t>
+              <a:t>2026/1/29</a:t>
             </a:fld>
             <a:endParaRPr lang="zh-CN" altLang="en-US"/>
           </a:p>
@@ -794,7 +794,7 @@
           <a:p>
             <a:fld id="{40F70359-C398-46F3-85A7-616FAE599AC8}" type="datetimeFigureOut">
               <a:rPr lang="zh-CN" altLang="en-US" smtClean="0"/>
-              <a:t>2026/1/24</a:t>
+              <a:t>2026/1/29</a:t>
             </a:fld>
             <a:endParaRPr lang="zh-CN" altLang="en-US"/>
           </a:p>
@@ -992,7 +992,7 @@
           <a:p>
             <a:fld id="{40F70359-C398-46F3-85A7-616FAE599AC8}" type="datetimeFigureOut">
               <a:rPr lang="zh-CN" altLang="en-US" smtClean="0"/>
-              <a:t>2026/1/24</a:t>
+              <a:t>2026/1/29</a:t>
             </a:fld>
             <a:endParaRPr lang="zh-CN" altLang="en-US"/>
           </a:p>
@@ -1200,7 +1200,7 @@
           <a:p>
             <a:fld id="{40F70359-C398-46F3-85A7-616FAE599AC8}" type="datetimeFigureOut">
               <a:rPr lang="zh-CN" altLang="en-US" smtClean="0"/>
-              <a:t>2026/1/24</a:t>
+              <a:t>2026/1/29</a:t>
             </a:fld>
             <a:endParaRPr lang="zh-CN" altLang="en-US"/>
           </a:p>
@@ -1398,7 +1398,7 @@
           <a:p>
             <a:fld id="{40F70359-C398-46F3-85A7-616FAE599AC8}" type="datetimeFigureOut">
               <a:rPr lang="zh-CN" altLang="en-US" smtClean="0"/>
-              <a:t>2026/1/24</a:t>
+              <a:t>2026/1/29</a:t>
             </a:fld>
             <a:endParaRPr lang="zh-CN" altLang="en-US"/>
           </a:p>
@@ -1673,7 +1673,7 @@
           <a:p>
             <a:fld id="{40F70359-C398-46F3-85A7-616FAE599AC8}" type="datetimeFigureOut">
               <a:rPr lang="zh-CN" altLang="en-US" smtClean="0"/>
-              <a:t>2026/1/24</a:t>
+              <a:t>2026/1/29</a:t>
             </a:fld>
             <a:endParaRPr lang="zh-CN" altLang="en-US"/>
           </a:p>
@@ -1938,7 +1938,7 @@
           <a:p>
             <a:fld id="{40F70359-C398-46F3-85A7-616FAE599AC8}" type="datetimeFigureOut">
               <a:rPr lang="zh-CN" altLang="en-US" smtClean="0"/>
-              <a:t>2026/1/24</a:t>
+              <a:t>2026/1/29</a:t>
             </a:fld>
             <a:endParaRPr lang="zh-CN" altLang="en-US"/>
           </a:p>
@@ -2350,7 +2350,7 @@
           <a:p>
             <a:fld id="{40F70359-C398-46F3-85A7-616FAE599AC8}" type="datetimeFigureOut">
               <a:rPr lang="zh-CN" altLang="en-US" smtClean="0"/>
-              <a:t>2026/1/24</a:t>
+              <a:t>2026/1/29</a:t>
             </a:fld>
             <a:endParaRPr lang="zh-CN" altLang="en-US"/>
           </a:p>
@@ -2491,7 +2491,7 @@
           <a:p>
             <a:fld id="{40F70359-C398-46F3-85A7-616FAE599AC8}" type="datetimeFigureOut">
               <a:rPr lang="zh-CN" altLang="en-US" smtClean="0"/>
-              <a:t>2026/1/24</a:t>
+              <a:t>2026/1/29</a:t>
             </a:fld>
             <a:endParaRPr lang="zh-CN" altLang="en-US"/>
           </a:p>
@@ -2604,7 +2604,7 @@
           <a:p>
             <a:fld id="{40F70359-C398-46F3-85A7-616FAE599AC8}" type="datetimeFigureOut">
               <a:rPr lang="zh-CN" altLang="en-US" smtClean="0"/>
-              <a:t>2026/1/24</a:t>
+              <a:t>2026/1/29</a:t>
             </a:fld>
             <a:endParaRPr lang="zh-CN" altLang="en-US"/>
           </a:p>
@@ -2915,7 +2915,7 @@
           <a:p>
             <a:fld id="{40F70359-C398-46F3-85A7-616FAE599AC8}" type="datetimeFigureOut">
               <a:rPr lang="zh-CN" altLang="en-US" smtClean="0"/>
-              <a:t>2026/1/24</a:t>
+              <a:t>2026/1/29</a:t>
             </a:fld>
             <a:endParaRPr lang="zh-CN" altLang="en-US"/>
           </a:p>
@@ -3203,7 +3203,7 @@
           <a:p>
             <a:fld id="{40F70359-C398-46F3-85A7-616FAE599AC8}" type="datetimeFigureOut">
               <a:rPr lang="zh-CN" altLang="en-US" smtClean="0"/>
-              <a:t>2026/1/24</a:t>
+              <a:t>2026/1/29</a:t>
             </a:fld>
             <a:endParaRPr lang="zh-CN" altLang="en-US"/>
           </a:p>
@@ -3444,7 +3444,7 @@
           <a:p>
             <a:fld id="{40F70359-C398-46F3-85A7-616FAE599AC8}" type="datetimeFigureOut">
               <a:rPr lang="zh-CN" altLang="en-US" smtClean="0"/>
-              <a:t>2026/1/24</a:t>
+              <a:t>2026/1/29</a:t>
             </a:fld>
             <a:endParaRPr lang="zh-CN" altLang="en-US"/>
           </a:p>
